--- a/public/lessons/year-6-maths/summer/week-23/solve-multi-step-measure-problems/teaching-powerpoint-v1.pptx
+++ b/public/lessons/year-6-maths/summer/week-23/solve-multi-step-measure-problems/teaching-powerpoint-v1.pptx
@@ -2,24 +2,24 @@
 <file path=ppt/presentation.xml><?xml version="1.0" encoding="utf-8"?>
 <p:presentation xmlns:p="http://schemas.openxmlformats.org/presentationml/2006/main">
   <p:sldMasterIdLst>
-    <p:sldMasterId xmlns:r="http://schemas.openxmlformats.org/officeDocument/2006/relationships" id="2147483648" r:id="R867e64419441490f"/>
+    <p:sldMasterId xmlns:r="http://schemas.openxmlformats.org/officeDocument/2006/relationships" id="2147483648" r:id="Rb85fb6faffbc4600"/>
   </p:sldMasterIdLst>
   <p:notesMasterIdLst>
-    <p:notesMasterId xmlns:r="http://schemas.openxmlformats.org/officeDocument/2006/relationships" r:id="Ref330db23d1a4d9e"/>
+    <p:notesMasterId xmlns:r="http://schemas.openxmlformats.org/officeDocument/2006/relationships" r:id="R5d4749902bc34255"/>
   </p:notesMasterIdLst>
   <p:sldIdLst>
-    <p:sldId xmlns:r="http://schemas.openxmlformats.org/officeDocument/2006/relationships" id="256" r:id="R7fc6341d26ae4428"/>
-    <p:sldId xmlns:r="http://schemas.openxmlformats.org/officeDocument/2006/relationships" id="257" r:id="Rc9dbffd46f1f44fa"/>
-    <p:sldId xmlns:r="http://schemas.openxmlformats.org/officeDocument/2006/relationships" id="258" r:id="R76b8b41b63ae45e5"/>
-    <p:sldId xmlns:r="http://schemas.openxmlformats.org/officeDocument/2006/relationships" id="259" r:id="R6842c499051e467d"/>
-    <p:sldId xmlns:r="http://schemas.openxmlformats.org/officeDocument/2006/relationships" id="260" r:id="R9af39b8bafa143e4"/>
-    <p:sldId xmlns:r="http://schemas.openxmlformats.org/officeDocument/2006/relationships" id="261" r:id="R824de60e83d54f6a"/>
-    <p:sldId xmlns:r="http://schemas.openxmlformats.org/officeDocument/2006/relationships" id="262" r:id="R7e131b2147a4499d"/>
-    <p:sldId xmlns:r="http://schemas.openxmlformats.org/officeDocument/2006/relationships" id="263" r:id="R9b98b1106d774845"/>
-    <p:sldId xmlns:r="http://schemas.openxmlformats.org/officeDocument/2006/relationships" id="264" r:id="Rca60d542b84d41ee"/>
-    <p:sldId xmlns:r="http://schemas.openxmlformats.org/officeDocument/2006/relationships" id="265" r:id="R5b55e32f239d4ec0"/>
-    <p:sldId xmlns:r="http://schemas.openxmlformats.org/officeDocument/2006/relationships" id="266" r:id="Rdb0c646db6fd4f67"/>
-    <p:sldId xmlns:r="http://schemas.openxmlformats.org/officeDocument/2006/relationships" id="267" r:id="Reafe043ff9684bcf"/>
+    <p:sldId xmlns:r="http://schemas.openxmlformats.org/officeDocument/2006/relationships" id="256" r:id="Rafcbb1a6919f4a3c"/>
+    <p:sldId xmlns:r="http://schemas.openxmlformats.org/officeDocument/2006/relationships" id="257" r:id="R49abdf04e6504367"/>
+    <p:sldId xmlns:r="http://schemas.openxmlformats.org/officeDocument/2006/relationships" id="258" r:id="R40df720b78a74e53"/>
+    <p:sldId xmlns:r="http://schemas.openxmlformats.org/officeDocument/2006/relationships" id="259" r:id="R3197da8ab94d4437"/>
+    <p:sldId xmlns:r="http://schemas.openxmlformats.org/officeDocument/2006/relationships" id="260" r:id="R5f4095b3673946cd"/>
+    <p:sldId xmlns:r="http://schemas.openxmlformats.org/officeDocument/2006/relationships" id="261" r:id="R4c8d21a1f7c0482a"/>
+    <p:sldId xmlns:r="http://schemas.openxmlformats.org/officeDocument/2006/relationships" id="262" r:id="R4c361e37d0da4f1f"/>
+    <p:sldId xmlns:r="http://schemas.openxmlformats.org/officeDocument/2006/relationships" id="263" r:id="R47e43b564daa449b"/>
+    <p:sldId xmlns:r="http://schemas.openxmlformats.org/officeDocument/2006/relationships" id="264" r:id="R83a543472a8c4df8"/>
+    <p:sldId xmlns:r="http://schemas.openxmlformats.org/officeDocument/2006/relationships" id="265" r:id="R7dc0fa18befa44cb"/>
+    <p:sldId xmlns:r="http://schemas.openxmlformats.org/officeDocument/2006/relationships" id="266" r:id="Ra1a940226f02422c"/>
+    <p:sldId xmlns:r="http://schemas.openxmlformats.org/officeDocument/2006/relationships" id="267" r:id="Rbe7ab5e5c80e4bde"/>
   </p:sldIdLst>
   <p:sldSz cx="12192000" cy="6858000"/>
   <p:notesSz cx="6858000" cy="9144000"/>
@@ -873,7 +873,7 @@
           <a:lstStyle xmlns:a="http://schemas.openxmlformats.org/drawingml/2006/main"/>
           <a:p xmlns:a="http://schemas.openxmlformats.org/drawingml/2006/main">
             <a:r>
-              <a:t>I do. Reveal the question, setup and each calculation stage one click at a time. Pupils watch before copying. Model answer: 31 complete pieces, with 10 cm left.</a:t>
+              <a:t>I do. Reveal the question, then reveal each mathematical change one click at a time. Point to the numbers and operation that changed before moving to the next line. Final answer: 31 complete pieces, with 10 cm left.</a:t>
             </a:r>
           </a:p>
         </p:txBody>
@@ -1291,7 +1291,7 @@
   </p:cSld>
   <p:clrMap bg1="lt1" tx1="dk1" bg2="lt2" tx2="dk2" accent1="accent1" accent2="accent2" accent3="accent3" accent4="accent4" accent5="accent5" accent6="accent6" hlink="hlink" folHlink="folHlink"/>
   <p:sldLayoutIdLst>
-    <p:sldLayoutId xmlns:r="http://schemas.openxmlformats.org/officeDocument/2006/relationships" id="2147483649" r:id="Reb7bd818ed11437b"/>
+    <p:sldLayoutId xmlns:r="http://schemas.openxmlformats.org/officeDocument/2006/relationships" id="2147483649" r:id="R1e6eeeacf47c4758"/>
   </p:sldLayoutIdLst>
   <p:txStyles>
     <p:titleStyle>
@@ -1842,7 +1842,7 @@
           <p:cNvPr id="12" name="">
             <a:extLst xmlns:a="http://schemas.openxmlformats.org/drawingml/2006/main">
               <a:ext uri="{FF2B5EF4-FFF2-40B4-BE49-F238E27FC236}">
-                <a16:creationId xmlns:a16="http://schemas.microsoft.com/office/drawing/2014/main" id="{ECD22E01-B140-40D1-9B37-A6B9CE5A6FE2}"/>
+                <a16:creationId xmlns:a16="http://schemas.microsoft.com/office/drawing/2014/main" id="{7A13495E-2B8E-4238-8495-99CDFB68A3F8}"/>
               </a:ext>
             </a:extLst>
           </p:cNvPr>
@@ -1874,7 +1874,7 @@
           <p:cNvPr id="2" name="">
             <a:extLst xmlns:a="http://schemas.openxmlformats.org/drawingml/2006/main">
               <a:ext uri="{FF2B5EF4-FFF2-40B4-BE49-F238E27FC236}">
-                <a16:creationId xmlns:a16="http://schemas.microsoft.com/office/drawing/2014/main" id="{EB459847-5B0E-4B03-A7F4-342CEDF81A5C}"/>
+                <a16:creationId xmlns:a16="http://schemas.microsoft.com/office/drawing/2014/main" id="{27214F50-8A48-4BCD-8270-D7A162779B43}"/>
               </a:ext>
             </a:extLst>
           </p:cNvPr>
@@ -1931,7 +1931,7 @@
           <p:cNvPr id="3" name="">
             <a:extLst xmlns:a="http://schemas.openxmlformats.org/drawingml/2006/main">
               <a:ext uri="{FF2B5EF4-FFF2-40B4-BE49-F238E27FC236}">
-                <a16:creationId xmlns:a16="http://schemas.microsoft.com/office/drawing/2014/main" id="{F569D8ED-8D3B-40E9-9AC8-B3FD5C00D0B8}"/>
+                <a16:creationId xmlns:a16="http://schemas.microsoft.com/office/drawing/2014/main" id="{C3EB3CFD-80AD-4A4B-817F-7F9F6691C74E}"/>
               </a:ext>
             </a:extLst>
           </p:cNvPr>
@@ -1965,7 +1965,7 @@
           <p:cNvPr id="4" name="">
             <a:extLst xmlns:a="http://schemas.openxmlformats.org/drawingml/2006/main">
               <a:ext uri="{FF2B5EF4-FFF2-40B4-BE49-F238E27FC236}">
-                <a16:creationId xmlns:a16="http://schemas.microsoft.com/office/drawing/2014/main" id="{4A75E763-82B3-4F3E-BB06-254DB8240CC5}"/>
+                <a16:creationId xmlns:a16="http://schemas.microsoft.com/office/drawing/2014/main" id="{A5733C62-27ED-471B-9153-984DA5212017}"/>
               </a:ext>
             </a:extLst>
           </p:cNvPr>
@@ -2022,7 +2022,7 @@
           <p:cNvPr id="5" name="">
             <a:extLst xmlns:a="http://schemas.openxmlformats.org/drawingml/2006/main">
               <a:ext uri="{FF2B5EF4-FFF2-40B4-BE49-F238E27FC236}">
-                <a16:creationId xmlns:a16="http://schemas.microsoft.com/office/drawing/2014/main" id="{4D516A9E-1898-404F-8A65-4A35742B7E7F}"/>
+                <a16:creationId xmlns:a16="http://schemas.microsoft.com/office/drawing/2014/main" id="{738F2157-96BC-4CCB-9C4B-37E9BFF62EAD}"/>
               </a:ext>
             </a:extLst>
           </p:cNvPr>
@@ -2079,7 +2079,7 @@
           <p:cNvPr id="6" name="">
             <a:extLst xmlns:a="http://schemas.openxmlformats.org/drawingml/2006/main">
               <a:ext uri="{FF2B5EF4-FFF2-40B4-BE49-F238E27FC236}">
-                <a16:creationId xmlns:a16="http://schemas.microsoft.com/office/drawing/2014/main" id="{4480260A-2230-4740-86B5-4CF0CE78477E}"/>
+                <a16:creationId xmlns:a16="http://schemas.microsoft.com/office/drawing/2014/main" id="{B5381B96-CF8C-437F-BC19-C86E6E281917}"/>
               </a:ext>
             </a:extLst>
           </p:cNvPr>
@@ -2113,7 +2113,7 @@
           <p:cNvPr id="7" name="">
             <a:extLst xmlns:a="http://schemas.openxmlformats.org/drawingml/2006/main">
               <a:ext uri="{FF2B5EF4-FFF2-40B4-BE49-F238E27FC236}">
-                <a16:creationId xmlns:a16="http://schemas.microsoft.com/office/drawing/2014/main" id="{9A5B0E12-08EF-471E-8FEA-689847D568F9}"/>
+                <a16:creationId xmlns:a16="http://schemas.microsoft.com/office/drawing/2014/main" id="{2682D44B-0EB0-4832-ABFB-B426B8C6C9B8}"/>
               </a:ext>
             </a:extLst>
           </p:cNvPr>
@@ -2170,7 +2170,7 @@
           <p:cNvPr id="8" name="">
             <a:extLst xmlns:a="http://schemas.openxmlformats.org/drawingml/2006/main">
               <a:ext uri="{FF2B5EF4-FFF2-40B4-BE49-F238E27FC236}">
-                <a16:creationId xmlns:a16="http://schemas.microsoft.com/office/drawing/2014/main" id="{79D6A9F0-4AD6-4291-817F-AB376ABB08B0}"/>
+                <a16:creationId xmlns:a16="http://schemas.microsoft.com/office/drawing/2014/main" id="{33514432-0CF3-4A2B-AB52-5B3A1394E311}"/>
               </a:ext>
             </a:extLst>
           </p:cNvPr>
@@ -2227,7 +2227,7 @@
           <p:cNvPr id="9" name="">
             <a:extLst xmlns:a="http://schemas.openxmlformats.org/drawingml/2006/main">
               <a:ext uri="{FF2B5EF4-FFF2-40B4-BE49-F238E27FC236}">
-                <a16:creationId xmlns:a16="http://schemas.microsoft.com/office/drawing/2014/main" id="{0E1DE89E-42A9-439F-9F02-14EF0FE359AB}"/>
+                <a16:creationId xmlns:a16="http://schemas.microsoft.com/office/drawing/2014/main" id="{3169B490-AA83-4AAA-B837-116CC83FACF0}"/>
               </a:ext>
             </a:extLst>
           </p:cNvPr>
@@ -2284,7 +2284,7 @@
           <p:cNvPr id="10" name="">
             <a:extLst xmlns:a="http://schemas.openxmlformats.org/drawingml/2006/main">
               <a:ext uri="{FF2B5EF4-FFF2-40B4-BE49-F238E27FC236}">
-                <a16:creationId xmlns:a16="http://schemas.microsoft.com/office/drawing/2014/main" id="{CA466416-48BC-412C-9FD0-53755F833E70}"/>
+                <a16:creationId xmlns:a16="http://schemas.microsoft.com/office/drawing/2014/main" id="{9351FD0D-4217-49FA-BA89-8CE3AE3AFB6B}"/>
               </a:ext>
             </a:extLst>
           </p:cNvPr>
@@ -2341,7 +2341,7 @@
           <p:cNvPr id="11" name="">
             <a:extLst xmlns:a="http://schemas.openxmlformats.org/drawingml/2006/main">
               <a:ext uri="{FF2B5EF4-FFF2-40B4-BE49-F238E27FC236}">
-                <a16:creationId xmlns:a16="http://schemas.microsoft.com/office/drawing/2014/main" id="{433EBEBB-26B1-4F5D-BE8E-8C17C4821BA2}"/>
+                <a16:creationId xmlns:a16="http://schemas.microsoft.com/office/drawing/2014/main" id="{EB345A8A-AE16-4A23-8981-6EB9F8B214D6}"/>
               </a:ext>
             </a:extLst>
           </p:cNvPr>
@@ -2396,7 +2396,7 @@
     </p:spTree>
     <p:extLst>
       <p:ext uri="{BB962C8B-B14F-4D97-AF65-F5344CB8AC3E}">
-        <p14:creationId xmlns:p14="http://schemas.microsoft.com/office/powerpoint/2010/main" val="1911172040"/>
+        <p14:creationId xmlns:p14="http://schemas.microsoft.com/office/powerpoint/2010/main" val="728971091"/>
       </p:ext>
     </p:extLst>
   </p:cSld>
@@ -2427,7 +2427,7 @@
           <p:cNvPr id="14" name="">
             <a:extLst xmlns:a="http://schemas.openxmlformats.org/drawingml/2006/main">
               <a:ext uri="{FF2B5EF4-FFF2-40B4-BE49-F238E27FC236}">
-                <a16:creationId xmlns:a16="http://schemas.microsoft.com/office/drawing/2014/main" id="{066165DA-EE8E-4E63-9712-E124F6FCC543}"/>
+                <a16:creationId xmlns:a16="http://schemas.microsoft.com/office/drawing/2014/main" id="{CD882EFB-4E45-4A6C-9685-1C90DC3A2969}"/>
               </a:ext>
             </a:extLst>
           </p:cNvPr>
@@ -2459,7 +2459,7 @@
           <p:cNvPr id="2" name="">
             <a:extLst xmlns:a="http://schemas.openxmlformats.org/drawingml/2006/main">
               <a:ext uri="{FF2B5EF4-FFF2-40B4-BE49-F238E27FC236}">
-                <a16:creationId xmlns:a16="http://schemas.microsoft.com/office/drawing/2014/main" id="{EB58113B-A65B-4D5D-A846-6D373443E481}"/>
+                <a16:creationId xmlns:a16="http://schemas.microsoft.com/office/drawing/2014/main" id="{06472F69-D4B9-45E4-90BA-918EFA31C651}"/>
               </a:ext>
             </a:extLst>
           </p:cNvPr>
@@ -2516,7 +2516,7 @@
           <p:cNvPr id="3" name="">
             <a:extLst xmlns:a="http://schemas.openxmlformats.org/drawingml/2006/main">
               <a:ext uri="{FF2B5EF4-FFF2-40B4-BE49-F238E27FC236}">
-                <a16:creationId xmlns:a16="http://schemas.microsoft.com/office/drawing/2014/main" id="{FF30FEA1-29D2-4F27-AB25-CCCC567111E8}"/>
+                <a16:creationId xmlns:a16="http://schemas.microsoft.com/office/drawing/2014/main" id="{EF2B2531-B8C4-476A-AD7F-355E4EDFDA70}"/>
               </a:ext>
             </a:extLst>
           </p:cNvPr>
@@ -2548,7 +2548,7 @@
           <p:cNvPr id="4" name="">
             <a:extLst xmlns:a="http://schemas.openxmlformats.org/drawingml/2006/main">
               <a:ext uri="{FF2B5EF4-FFF2-40B4-BE49-F238E27FC236}">
-                <a16:creationId xmlns:a16="http://schemas.microsoft.com/office/drawing/2014/main" id="{C4BBDB08-6647-4FDE-A8D4-9EBB074C08D0}"/>
+                <a16:creationId xmlns:a16="http://schemas.microsoft.com/office/drawing/2014/main" id="{AA1652F5-E3BD-487E-8201-4B2D205EC8FB}"/>
               </a:ext>
             </a:extLst>
           </p:cNvPr>
@@ -2605,7 +2605,7 @@
           <p:cNvPr id="5" name="">
             <a:extLst xmlns:a="http://schemas.openxmlformats.org/drawingml/2006/main">
               <a:ext uri="{FF2B5EF4-FFF2-40B4-BE49-F238E27FC236}">
-                <a16:creationId xmlns:a16="http://schemas.microsoft.com/office/drawing/2014/main" id="{26018E98-B2D4-4B12-892F-743FEA97A7AD}"/>
+                <a16:creationId xmlns:a16="http://schemas.microsoft.com/office/drawing/2014/main" id="{113C1BB3-0819-4C54-AB40-3B967B8E7F50}"/>
               </a:ext>
             </a:extLst>
           </p:cNvPr>
@@ -2662,7 +2662,7 @@
           <p:cNvPr id="6" name="">
             <a:extLst xmlns:a="http://schemas.openxmlformats.org/drawingml/2006/main">
               <a:ext uri="{FF2B5EF4-FFF2-40B4-BE49-F238E27FC236}">
-                <a16:creationId xmlns:a16="http://schemas.microsoft.com/office/drawing/2014/main" id="{091F8086-FE5A-4706-8005-5C1BEFC7BD73}"/>
+                <a16:creationId xmlns:a16="http://schemas.microsoft.com/office/drawing/2014/main" id="{BBC92BB5-D308-4C0B-8797-66EEBE36698B}"/>
               </a:ext>
             </a:extLst>
           </p:cNvPr>
@@ -2719,7 +2719,7 @@
           <p:cNvPr id="7" name="">
             <a:extLst xmlns:a="http://schemas.openxmlformats.org/drawingml/2006/main">
               <a:ext uri="{FF2B5EF4-FFF2-40B4-BE49-F238E27FC236}">
-                <a16:creationId xmlns:a16="http://schemas.microsoft.com/office/drawing/2014/main" id="{3D01FB8F-CB84-422A-B6B0-C0F14BCE7B4B}"/>
+                <a16:creationId xmlns:a16="http://schemas.microsoft.com/office/drawing/2014/main" id="{191C99DA-8FB0-46F3-B379-222EA0FB1A0B}"/>
               </a:ext>
             </a:extLst>
           </p:cNvPr>
@@ -2751,7 +2751,7 @@
           <p:cNvPr id="8" name="">
             <a:extLst xmlns:a="http://schemas.openxmlformats.org/drawingml/2006/main">
               <a:ext uri="{FF2B5EF4-FFF2-40B4-BE49-F238E27FC236}">
-                <a16:creationId xmlns:a16="http://schemas.microsoft.com/office/drawing/2014/main" id="{E4C278E5-7F28-495B-81CF-7ABEDDDD5555}"/>
+                <a16:creationId xmlns:a16="http://schemas.microsoft.com/office/drawing/2014/main" id="{86A80FAE-1449-4334-B362-1AAA38740640}"/>
               </a:ext>
             </a:extLst>
           </p:cNvPr>
@@ -2808,7 +2808,7 @@
           <p:cNvPr id="9" name="">
             <a:extLst xmlns:a="http://schemas.openxmlformats.org/drawingml/2006/main">
               <a:ext uri="{FF2B5EF4-FFF2-40B4-BE49-F238E27FC236}">
-                <a16:creationId xmlns:a16="http://schemas.microsoft.com/office/drawing/2014/main" id="{604C84CC-4393-4B89-BCE9-1A12540DDC20}"/>
+                <a16:creationId xmlns:a16="http://schemas.microsoft.com/office/drawing/2014/main" id="{834B427F-A7C2-4A19-B707-22527DBE8CA9}"/>
               </a:ext>
             </a:extLst>
           </p:cNvPr>
@@ -2865,7 +2865,7 @@
           <p:cNvPr id="10" name="">
             <a:extLst xmlns:a="http://schemas.openxmlformats.org/drawingml/2006/main">
               <a:ext uri="{FF2B5EF4-FFF2-40B4-BE49-F238E27FC236}">
-                <a16:creationId xmlns:a16="http://schemas.microsoft.com/office/drawing/2014/main" id="{0A202BD9-9325-40C9-AC95-2853ACDD6F3A}"/>
+                <a16:creationId xmlns:a16="http://schemas.microsoft.com/office/drawing/2014/main" id="{738115E0-A907-4609-B8E5-1F5F49C2AD5E}"/>
               </a:ext>
             </a:extLst>
           </p:cNvPr>
@@ -2922,7 +2922,7 @@
           <p:cNvPr id="11" name="">
             <a:extLst xmlns:a="http://schemas.openxmlformats.org/drawingml/2006/main">
               <a:ext uri="{FF2B5EF4-FFF2-40B4-BE49-F238E27FC236}">
-                <a16:creationId xmlns:a16="http://schemas.microsoft.com/office/drawing/2014/main" id="{DDF66287-594D-48BB-A542-85C3D491924F}"/>
+                <a16:creationId xmlns:a16="http://schemas.microsoft.com/office/drawing/2014/main" id="{320179D3-A66A-4E63-B610-15EBDC3A765C}"/>
               </a:ext>
             </a:extLst>
           </p:cNvPr>
@@ -2979,7 +2979,7 @@
           <p:cNvPr id="12" name="">
             <a:extLst xmlns:a="http://schemas.openxmlformats.org/drawingml/2006/main">
               <a:ext uri="{FF2B5EF4-FFF2-40B4-BE49-F238E27FC236}">
-                <a16:creationId xmlns:a16="http://schemas.microsoft.com/office/drawing/2014/main" id="{4BF7BE39-DE9F-4083-8383-89945F334217}"/>
+                <a16:creationId xmlns:a16="http://schemas.microsoft.com/office/drawing/2014/main" id="{285C4656-1E93-4A48-8507-8F128D793D53}"/>
               </a:ext>
             </a:extLst>
           </p:cNvPr>
@@ -3036,7 +3036,7 @@
           <p:cNvPr id="13" name="">
             <a:extLst xmlns:a="http://schemas.openxmlformats.org/drawingml/2006/main">
               <a:ext uri="{FF2B5EF4-FFF2-40B4-BE49-F238E27FC236}">
-                <a16:creationId xmlns:a16="http://schemas.microsoft.com/office/drawing/2014/main" id="{6234467F-0CC6-4EEE-BEA1-051EB23DCEC9}"/>
+                <a16:creationId xmlns:a16="http://schemas.microsoft.com/office/drawing/2014/main" id="{071A0E62-0E68-4307-918A-04B28FD10920}"/>
               </a:ext>
             </a:extLst>
           </p:cNvPr>
@@ -3091,7 +3091,7 @@
     </p:spTree>
     <p:extLst>
       <p:ext uri="{BB962C8B-B14F-4D97-AF65-F5344CB8AC3E}">
-        <p14:creationId xmlns:p14="http://schemas.microsoft.com/office/powerpoint/2010/main" val="2011665702"/>
+        <p14:creationId xmlns:p14="http://schemas.microsoft.com/office/powerpoint/2010/main" val="82413538"/>
       </p:ext>
     </p:extLst>
   </p:cSld>
@@ -3292,7 +3292,7 @@
           <p:cNvPr id="19" name="">
             <a:extLst xmlns:a="http://schemas.openxmlformats.org/drawingml/2006/main">
               <a:ext uri="{FF2B5EF4-FFF2-40B4-BE49-F238E27FC236}">
-                <a16:creationId xmlns:a16="http://schemas.microsoft.com/office/drawing/2014/main" id="{901B6314-F48F-461B-9F6E-A1562ECA02F0}"/>
+                <a16:creationId xmlns:a16="http://schemas.microsoft.com/office/drawing/2014/main" id="{F47628E7-394B-400A-A4D7-4E97738199C7}"/>
               </a:ext>
             </a:extLst>
           </p:cNvPr>
@@ -3324,7 +3324,7 @@
           <p:cNvPr id="2" name="">
             <a:extLst xmlns:a="http://schemas.openxmlformats.org/drawingml/2006/main">
               <a:ext uri="{FF2B5EF4-FFF2-40B4-BE49-F238E27FC236}">
-                <a16:creationId xmlns:a16="http://schemas.microsoft.com/office/drawing/2014/main" id="{B47E28B9-3BEA-4D3F-B371-47E420E137F3}"/>
+                <a16:creationId xmlns:a16="http://schemas.microsoft.com/office/drawing/2014/main" id="{B7EF9FE8-38D5-481E-92AA-4BD4B65E6CCA}"/>
               </a:ext>
             </a:extLst>
           </p:cNvPr>
@@ -3381,7 +3381,7 @@
           <p:cNvPr id="3" name="">
             <a:extLst xmlns:a="http://schemas.openxmlformats.org/drawingml/2006/main">
               <a:ext uri="{FF2B5EF4-FFF2-40B4-BE49-F238E27FC236}">
-                <a16:creationId xmlns:a16="http://schemas.microsoft.com/office/drawing/2014/main" id="{79328BD7-8A61-4E94-8A0B-AE2E2E95AD56}"/>
+                <a16:creationId xmlns:a16="http://schemas.microsoft.com/office/drawing/2014/main" id="{EA5E94FA-05A4-4223-8F08-8BCC00261820}"/>
               </a:ext>
             </a:extLst>
           </p:cNvPr>
@@ -3413,7 +3413,7 @@
           <p:cNvPr id="4" name="">
             <a:extLst xmlns:a="http://schemas.openxmlformats.org/drawingml/2006/main">
               <a:ext uri="{FF2B5EF4-FFF2-40B4-BE49-F238E27FC236}">
-                <a16:creationId xmlns:a16="http://schemas.microsoft.com/office/drawing/2014/main" id="{997C9E0E-D9C2-44A6-AC63-623CF534D525}"/>
+                <a16:creationId xmlns:a16="http://schemas.microsoft.com/office/drawing/2014/main" id="{19420E40-6B3A-4BFC-933A-C524EE3E211C}"/>
               </a:ext>
             </a:extLst>
           </p:cNvPr>
@@ -3470,7 +3470,7 @@
           <p:cNvPr id="5" name="">
             <a:extLst xmlns:a="http://schemas.openxmlformats.org/drawingml/2006/main">
               <a:ext uri="{FF2B5EF4-FFF2-40B4-BE49-F238E27FC236}">
-                <a16:creationId xmlns:a16="http://schemas.microsoft.com/office/drawing/2014/main" id="{6950BBD2-0C29-4BFF-963B-00BDBA4812A3}"/>
+                <a16:creationId xmlns:a16="http://schemas.microsoft.com/office/drawing/2014/main" id="{1124AC81-C458-439B-B794-DCC87EEC65D6}"/>
               </a:ext>
             </a:extLst>
           </p:cNvPr>
@@ -3527,7 +3527,7 @@
           <p:cNvPr id="6" name="">
             <a:extLst xmlns:a="http://schemas.openxmlformats.org/drawingml/2006/main">
               <a:ext uri="{FF2B5EF4-FFF2-40B4-BE49-F238E27FC236}">
-                <a16:creationId xmlns:a16="http://schemas.microsoft.com/office/drawing/2014/main" id="{BD7170EB-0A32-4821-9A54-3B979CEC244F}"/>
+                <a16:creationId xmlns:a16="http://schemas.microsoft.com/office/drawing/2014/main" id="{F514AF11-F548-4E27-8D5E-1244F8ED69A4}"/>
               </a:ext>
             </a:extLst>
           </p:cNvPr>
@@ -3584,7 +3584,7 @@
           <p:cNvPr id="7" name="">
             <a:extLst xmlns:a="http://schemas.openxmlformats.org/drawingml/2006/main">
               <a:ext uri="{FF2B5EF4-FFF2-40B4-BE49-F238E27FC236}">
-                <a16:creationId xmlns:a16="http://schemas.microsoft.com/office/drawing/2014/main" id="{4DEA0D9D-AEC3-4D19-BB2D-038C7EEB71FC}"/>
+                <a16:creationId xmlns:a16="http://schemas.microsoft.com/office/drawing/2014/main" id="{92F1C4A4-E591-4C18-9598-D0317D5B4024}"/>
               </a:ext>
             </a:extLst>
           </p:cNvPr>
@@ -3616,7 +3616,7 @@
           <p:cNvPr id="8" name="">
             <a:extLst xmlns:a="http://schemas.openxmlformats.org/drawingml/2006/main">
               <a:ext uri="{FF2B5EF4-FFF2-40B4-BE49-F238E27FC236}">
-                <a16:creationId xmlns:a16="http://schemas.microsoft.com/office/drawing/2014/main" id="{BC12BB33-42DF-424B-8205-AAD08060B71B}"/>
+                <a16:creationId xmlns:a16="http://schemas.microsoft.com/office/drawing/2014/main" id="{C5CE2208-5C7C-493C-8236-6228C5816222}"/>
               </a:ext>
             </a:extLst>
           </p:cNvPr>
@@ -3673,7 +3673,7 @@
           <p:cNvPr id="9" name="">
             <a:extLst xmlns:a="http://schemas.openxmlformats.org/drawingml/2006/main">
               <a:ext uri="{FF2B5EF4-FFF2-40B4-BE49-F238E27FC236}">
-                <a16:creationId xmlns:a16="http://schemas.microsoft.com/office/drawing/2014/main" id="{94A546E5-200B-43A2-84B2-CE2C6BCCF579}"/>
+                <a16:creationId xmlns:a16="http://schemas.microsoft.com/office/drawing/2014/main" id="{46828BE9-9886-46C1-9AF6-E8AE5F13AB7C}"/>
               </a:ext>
             </a:extLst>
           </p:cNvPr>
@@ -3730,7 +3730,7 @@
           <p:cNvPr id="10" name="">
             <a:extLst xmlns:a="http://schemas.openxmlformats.org/drawingml/2006/main">
               <a:ext uri="{FF2B5EF4-FFF2-40B4-BE49-F238E27FC236}">
-                <a16:creationId xmlns:a16="http://schemas.microsoft.com/office/drawing/2014/main" id="{DBCC7309-7624-4A5C-9C57-118EBBD8DE3A}"/>
+                <a16:creationId xmlns:a16="http://schemas.microsoft.com/office/drawing/2014/main" id="{947FD611-F44B-459E-819B-9BBA4A32B479}"/>
               </a:ext>
             </a:extLst>
           </p:cNvPr>
@@ -3787,7 +3787,7 @@
           <p:cNvPr id="11" name="">
             <a:extLst xmlns:a="http://schemas.openxmlformats.org/drawingml/2006/main">
               <a:ext uri="{FF2B5EF4-FFF2-40B4-BE49-F238E27FC236}">
-                <a16:creationId xmlns:a16="http://schemas.microsoft.com/office/drawing/2014/main" id="{A734EE80-417A-4D63-9333-BBCF3CEFA6BB}"/>
+                <a16:creationId xmlns:a16="http://schemas.microsoft.com/office/drawing/2014/main" id="{F6C14C33-422A-4CB8-B804-2E8C6CDF6139}"/>
               </a:ext>
             </a:extLst>
           </p:cNvPr>
@@ -3821,7 +3821,7 @@
           <p:cNvPr id="12" name="">
             <a:extLst xmlns:a="http://schemas.openxmlformats.org/drawingml/2006/main">
               <a:ext uri="{FF2B5EF4-FFF2-40B4-BE49-F238E27FC236}">
-                <a16:creationId xmlns:a16="http://schemas.microsoft.com/office/drawing/2014/main" id="{4E7FC87C-A616-4C82-AC6E-4FBC576BAB56}"/>
+                <a16:creationId xmlns:a16="http://schemas.microsoft.com/office/drawing/2014/main" id="{3C446FDB-0646-4AC6-BE7C-663C4444BA0A}"/>
               </a:ext>
             </a:extLst>
           </p:cNvPr>
@@ -3878,7 +3878,7 @@
           <p:cNvPr id="13" name="">
             <a:extLst xmlns:a="http://schemas.openxmlformats.org/drawingml/2006/main">
               <a:ext uri="{FF2B5EF4-FFF2-40B4-BE49-F238E27FC236}">
-                <a16:creationId xmlns:a16="http://schemas.microsoft.com/office/drawing/2014/main" id="{2D0768EA-692E-4CC4-8266-4BC74746A933}"/>
+                <a16:creationId xmlns:a16="http://schemas.microsoft.com/office/drawing/2014/main" id="{7948FBEB-272F-4E09-ACAB-60D3E2B1B642}"/>
               </a:ext>
             </a:extLst>
           </p:cNvPr>
@@ -3935,7 +3935,7 @@
           <p:cNvPr id="14" name="">
             <a:extLst xmlns:a="http://schemas.openxmlformats.org/drawingml/2006/main">
               <a:ext uri="{FF2B5EF4-FFF2-40B4-BE49-F238E27FC236}">
-                <a16:creationId xmlns:a16="http://schemas.microsoft.com/office/drawing/2014/main" id="{85E88996-C2FD-4E0D-B68C-8F3972339AF9}"/>
+                <a16:creationId xmlns:a16="http://schemas.microsoft.com/office/drawing/2014/main" id="{54E8B3BD-9D7E-4F23-A81B-94EB83B9DCFC}"/>
               </a:ext>
             </a:extLst>
           </p:cNvPr>
@@ -3992,7 +3992,7 @@
           <p:cNvPr id="15" name="">
             <a:extLst xmlns:a="http://schemas.openxmlformats.org/drawingml/2006/main">
               <a:ext uri="{FF2B5EF4-FFF2-40B4-BE49-F238E27FC236}">
-                <a16:creationId xmlns:a16="http://schemas.microsoft.com/office/drawing/2014/main" id="{DB793F70-EDE3-4128-9C85-C8963B08F704}"/>
+                <a16:creationId xmlns:a16="http://schemas.microsoft.com/office/drawing/2014/main" id="{D2F072FE-0367-4D40-89D8-484C4D957DE9}"/>
               </a:ext>
             </a:extLst>
           </p:cNvPr>
@@ -4026,7 +4026,7 @@
           <p:cNvPr id="16" name="">
             <a:extLst xmlns:a="http://schemas.openxmlformats.org/drawingml/2006/main">
               <a:ext uri="{FF2B5EF4-FFF2-40B4-BE49-F238E27FC236}">
-                <a16:creationId xmlns:a16="http://schemas.microsoft.com/office/drawing/2014/main" id="{485D86D3-5D4D-43D7-872F-6775E3E5AF90}"/>
+                <a16:creationId xmlns:a16="http://schemas.microsoft.com/office/drawing/2014/main" id="{80AA3432-A1AB-48B9-8910-3E5B96008ECC}"/>
               </a:ext>
             </a:extLst>
           </p:cNvPr>
@@ -4083,7 +4083,7 @@
           <p:cNvPr id="17" name="">
             <a:extLst xmlns:a="http://schemas.openxmlformats.org/drawingml/2006/main">
               <a:ext uri="{FF2B5EF4-FFF2-40B4-BE49-F238E27FC236}">
-                <a16:creationId xmlns:a16="http://schemas.microsoft.com/office/drawing/2014/main" id="{A100F5D4-3111-4B18-944A-4F62692EEC56}"/>
+                <a16:creationId xmlns:a16="http://schemas.microsoft.com/office/drawing/2014/main" id="{41429BED-2D54-45A9-B50C-8EFBE804A1A5}"/>
               </a:ext>
             </a:extLst>
           </p:cNvPr>
@@ -4140,7 +4140,7 @@
           <p:cNvPr id="18" name="">
             <a:extLst xmlns:a="http://schemas.openxmlformats.org/drawingml/2006/main">
               <a:ext uri="{FF2B5EF4-FFF2-40B4-BE49-F238E27FC236}">
-                <a16:creationId xmlns:a16="http://schemas.microsoft.com/office/drawing/2014/main" id="{A7212270-634D-4EE5-BB37-42D778508454}"/>
+                <a16:creationId xmlns:a16="http://schemas.microsoft.com/office/drawing/2014/main" id="{D81E10D7-16C5-4E79-B037-0FE129104054}"/>
               </a:ext>
             </a:extLst>
           </p:cNvPr>
@@ -4195,7 +4195,7 @@
     </p:spTree>
     <p:extLst>
       <p:ext uri="{BB962C8B-B14F-4D97-AF65-F5344CB8AC3E}">
-        <p14:creationId xmlns:p14="http://schemas.microsoft.com/office/powerpoint/2010/main" val="486277224"/>
+        <p14:creationId xmlns:p14="http://schemas.microsoft.com/office/powerpoint/2010/main" val="461159794"/>
       </p:ext>
     </p:extLst>
   </p:cSld>
@@ -4350,7 +4350,7 @@
           <p:cNvPr id="23" name="">
             <a:extLst xmlns:a="http://schemas.openxmlformats.org/drawingml/2006/main">
               <a:ext uri="{FF2B5EF4-FFF2-40B4-BE49-F238E27FC236}">
-                <a16:creationId xmlns:a16="http://schemas.microsoft.com/office/drawing/2014/main" id="{5D722614-BEE6-4A44-9CAD-DB07821CB896}"/>
+                <a16:creationId xmlns:a16="http://schemas.microsoft.com/office/drawing/2014/main" id="{39F95593-A9D4-4F1E-8D0E-F3C971DDF692}"/>
               </a:ext>
             </a:extLst>
           </p:cNvPr>
@@ -4382,7 +4382,7 @@
           <p:cNvPr id="2" name="">
             <a:extLst xmlns:a="http://schemas.openxmlformats.org/drawingml/2006/main">
               <a:ext uri="{FF2B5EF4-FFF2-40B4-BE49-F238E27FC236}">
-                <a16:creationId xmlns:a16="http://schemas.microsoft.com/office/drawing/2014/main" id="{326E3501-DF9C-4BCB-BFD0-AEB4CC67BF21}"/>
+                <a16:creationId xmlns:a16="http://schemas.microsoft.com/office/drawing/2014/main" id="{FC259F88-18E0-48D0-8BA5-43B2EB22483E}"/>
               </a:ext>
             </a:extLst>
           </p:cNvPr>
@@ -4439,7 +4439,7 @@
           <p:cNvPr id="3" name="">
             <a:extLst xmlns:a="http://schemas.openxmlformats.org/drawingml/2006/main">
               <a:ext uri="{FF2B5EF4-FFF2-40B4-BE49-F238E27FC236}">
-                <a16:creationId xmlns:a16="http://schemas.microsoft.com/office/drawing/2014/main" id="{C36BBFC9-28E6-4E68-B109-13DDC116D66C}"/>
+                <a16:creationId xmlns:a16="http://schemas.microsoft.com/office/drawing/2014/main" id="{9BE17C75-935E-4628-A081-89AD19274C10}"/>
               </a:ext>
             </a:extLst>
           </p:cNvPr>
@@ -4471,7 +4471,7 @@
           <p:cNvPr id="4" name="">
             <a:extLst xmlns:a="http://schemas.openxmlformats.org/drawingml/2006/main">
               <a:ext uri="{FF2B5EF4-FFF2-40B4-BE49-F238E27FC236}">
-                <a16:creationId xmlns:a16="http://schemas.microsoft.com/office/drawing/2014/main" id="{E6C6570A-1647-4017-A84D-41D4908D705C}"/>
+                <a16:creationId xmlns:a16="http://schemas.microsoft.com/office/drawing/2014/main" id="{F7687B8D-DD6D-44A1-BA1F-EED0E6DF1EFF}"/>
               </a:ext>
             </a:extLst>
           </p:cNvPr>
@@ -4528,7 +4528,7 @@
           <p:cNvPr id="5" name="">
             <a:extLst xmlns:a="http://schemas.openxmlformats.org/drawingml/2006/main">
               <a:ext uri="{FF2B5EF4-FFF2-40B4-BE49-F238E27FC236}">
-                <a16:creationId xmlns:a16="http://schemas.microsoft.com/office/drawing/2014/main" id="{E092B73F-D92B-4071-AC62-CD5701B6923A}"/>
+                <a16:creationId xmlns:a16="http://schemas.microsoft.com/office/drawing/2014/main" id="{281C7F35-4270-400A-9335-CFFFE90D9296}"/>
               </a:ext>
             </a:extLst>
           </p:cNvPr>
@@ -4585,7 +4585,7 @@
           <p:cNvPr id="6" name="">
             <a:extLst xmlns:a="http://schemas.openxmlformats.org/drawingml/2006/main">
               <a:ext uri="{FF2B5EF4-FFF2-40B4-BE49-F238E27FC236}">
-                <a16:creationId xmlns:a16="http://schemas.microsoft.com/office/drawing/2014/main" id="{B5F6AB05-E3B1-412B-B6FF-58703002C8D8}"/>
+                <a16:creationId xmlns:a16="http://schemas.microsoft.com/office/drawing/2014/main" id="{BF96798B-9F25-4AC0-99B5-27DD48A5CC32}"/>
               </a:ext>
             </a:extLst>
           </p:cNvPr>
@@ -4642,7 +4642,7 @@
           <p:cNvPr id="7" name="">
             <a:extLst xmlns:a="http://schemas.openxmlformats.org/drawingml/2006/main">
               <a:ext uri="{FF2B5EF4-FFF2-40B4-BE49-F238E27FC236}">
-                <a16:creationId xmlns:a16="http://schemas.microsoft.com/office/drawing/2014/main" id="{CA3AD9A3-4EA0-4D3D-8DB1-6CFEBAA0E38F}"/>
+                <a16:creationId xmlns:a16="http://schemas.microsoft.com/office/drawing/2014/main" id="{5B35DE97-74B0-46E2-B204-42FCCDED3199}"/>
               </a:ext>
             </a:extLst>
           </p:cNvPr>
@@ -4674,7 +4674,7 @@
           <p:cNvPr id="8" name="">
             <a:extLst xmlns:a="http://schemas.openxmlformats.org/drawingml/2006/main">
               <a:ext uri="{FF2B5EF4-FFF2-40B4-BE49-F238E27FC236}">
-                <a16:creationId xmlns:a16="http://schemas.microsoft.com/office/drawing/2014/main" id="{E56C71D5-4BD4-4880-AE26-9E2020F6EA54}"/>
+                <a16:creationId xmlns:a16="http://schemas.microsoft.com/office/drawing/2014/main" id="{CDDE405D-BCD7-479D-BF22-87122D8494B5}"/>
               </a:ext>
             </a:extLst>
           </p:cNvPr>
@@ -4731,7 +4731,7 @@
           <p:cNvPr id="9" name="">
             <a:extLst xmlns:a="http://schemas.openxmlformats.org/drawingml/2006/main">
               <a:ext uri="{FF2B5EF4-FFF2-40B4-BE49-F238E27FC236}">
-                <a16:creationId xmlns:a16="http://schemas.microsoft.com/office/drawing/2014/main" id="{FF0C4A32-1AA0-4F54-9FA6-2B899099B705}"/>
+                <a16:creationId xmlns:a16="http://schemas.microsoft.com/office/drawing/2014/main" id="{D89A92BD-F070-4B14-9240-79857BDDF76B}"/>
               </a:ext>
             </a:extLst>
           </p:cNvPr>
@@ -4788,7 +4788,7 @@
           <p:cNvPr id="10" name="">
             <a:extLst xmlns:a="http://schemas.openxmlformats.org/drawingml/2006/main">
               <a:ext uri="{FF2B5EF4-FFF2-40B4-BE49-F238E27FC236}">
-                <a16:creationId xmlns:a16="http://schemas.microsoft.com/office/drawing/2014/main" id="{6E6F522B-55CD-4DCD-9B0E-87EE18269898}"/>
+                <a16:creationId xmlns:a16="http://schemas.microsoft.com/office/drawing/2014/main" id="{6B44D02C-7797-4759-A851-200A811CC4D3}"/>
               </a:ext>
             </a:extLst>
           </p:cNvPr>
@@ -4822,7 +4822,7 @@
           <p:cNvPr id="11" name="">
             <a:extLst xmlns:a="http://schemas.openxmlformats.org/drawingml/2006/main">
               <a:ext uri="{FF2B5EF4-FFF2-40B4-BE49-F238E27FC236}">
-                <a16:creationId xmlns:a16="http://schemas.microsoft.com/office/drawing/2014/main" id="{05CADA63-6856-4AF4-8D02-78582262ABD1}"/>
+                <a16:creationId xmlns:a16="http://schemas.microsoft.com/office/drawing/2014/main" id="{38DF9827-4BA9-4810-9460-0584D079D41D}"/>
               </a:ext>
             </a:extLst>
           </p:cNvPr>
@@ -4854,7 +4854,7 @@
           <p:cNvPr id="12" name="">
             <a:extLst xmlns:a="http://schemas.openxmlformats.org/drawingml/2006/main">
               <a:ext uri="{FF2B5EF4-FFF2-40B4-BE49-F238E27FC236}">
-                <a16:creationId xmlns:a16="http://schemas.microsoft.com/office/drawing/2014/main" id="{6A17F480-18A3-4686-BDEE-6D6318209C46}"/>
+                <a16:creationId xmlns:a16="http://schemas.microsoft.com/office/drawing/2014/main" id="{0712BD4E-FF91-40FC-817E-BC756D6E88FE}"/>
               </a:ext>
             </a:extLst>
           </p:cNvPr>
@@ -4911,7 +4911,7 @@
           <p:cNvPr id="13" name="">
             <a:extLst xmlns:a="http://schemas.openxmlformats.org/drawingml/2006/main">
               <a:ext uri="{FF2B5EF4-FFF2-40B4-BE49-F238E27FC236}">
-                <a16:creationId xmlns:a16="http://schemas.microsoft.com/office/drawing/2014/main" id="{8ACC79F0-E8A3-403F-BCB8-5BBB08EB9A65}"/>
+                <a16:creationId xmlns:a16="http://schemas.microsoft.com/office/drawing/2014/main" id="{22CE0773-6010-408B-AF0D-D5DEF73B5704}"/>
               </a:ext>
             </a:extLst>
           </p:cNvPr>
@@ -4968,7 +4968,7 @@
           <p:cNvPr id="14" name="">
             <a:extLst xmlns:a="http://schemas.openxmlformats.org/drawingml/2006/main">
               <a:ext uri="{FF2B5EF4-FFF2-40B4-BE49-F238E27FC236}">
-                <a16:creationId xmlns:a16="http://schemas.microsoft.com/office/drawing/2014/main" id="{B0AFD2EE-DF6D-482E-81EA-CAF1C309CE95}"/>
+                <a16:creationId xmlns:a16="http://schemas.microsoft.com/office/drawing/2014/main" id="{C10E8770-2B6C-4086-8682-3E701E2FBDC4}"/>
               </a:ext>
             </a:extLst>
           </p:cNvPr>
@@ -5002,7 +5002,7 @@
           <p:cNvPr id="15" name="">
             <a:extLst xmlns:a="http://schemas.openxmlformats.org/drawingml/2006/main">
               <a:ext uri="{FF2B5EF4-FFF2-40B4-BE49-F238E27FC236}">
-                <a16:creationId xmlns:a16="http://schemas.microsoft.com/office/drawing/2014/main" id="{DACC86C8-90BC-4CEC-88D1-1F3936C3795F}"/>
+                <a16:creationId xmlns:a16="http://schemas.microsoft.com/office/drawing/2014/main" id="{7F44A751-C3DF-4182-8798-9B80ED8B1845}"/>
               </a:ext>
             </a:extLst>
           </p:cNvPr>
@@ -5034,7 +5034,7 @@
           <p:cNvPr id="16" name="">
             <a:extLst xmlns:a="http://schemas.openxmlformats.org/drawingml/2006/main">
               <a:ext uri="{FF2B5EF4-FFF2-40B4-BE49-F238E27FC236}">
-                <a16:creationId xmlns:a16="http://schemas.microsoft.com/office/drawing/2014/main" id="{5C55CFC9-86EE-489B-8977-E34E9FE196A2}"/>
+                <a16:creationId xmlns:a16="http://schemas.microsoft.com/office/drawing/2014/main" id="{5C053142-D98E-4D19-935F-379D206722CC}"/>
               </a:ext>
             </a:extLst>
           </p:cNvPr>
@@ -5091,7 +5091,7 @@
           <p:cNvPr id="17" name="">
             <a:extLst xmlns:a="http://schemas.openxmlformats.org/drawingml/2006/main">
               <a:ext uri="{FF2B5EF4-FFF2-40B4-BE49-F238E27FC236}">
-                <a16:creationId xmlns:a16="http://schemas.microsoft.com/office/drawing/2014/main" id="{103399A6-A864-4AD6-9AFD-968159D5DB3E}"/>
+                <a16:creationId xmlns:a16="http://schemas.microsoft.com/office/drawing/2014/main" id="{D0C69956-1E22-49A9-A434-00595E979153}"/>
               </a:ext>
             </a:extLst>
           </p:cNvPr>
@@ -5148,7 +5148,7 @@
           <p:cNvPr id="18" name="">
             <a:extLst xmlns:a="http://schemas.openxmlformats.org/drawingml/2006/main">
               <a:ext uri="{FF2B5EF4-FFF2-40B4-BE49-F238E27FC236}">
-                <a16:creationId xmlns:a16="http://schemas.microsoft.com/office/drawing/2014/main" id="{CD1003AE-7086-4B37-A56C-A0F5BAB3EEC1}"/>
+                <a16:creationId xmlns:a16="http://schemas.microsoft.com/office/drawing/2014/main" id="{895856F8-654C-4951-BF48-CE259C537150}"/>
               </a:ext>
             </a:extLst>
           </p:cNvPr>
@@ -5182,7 +5182,7 @@
           <p:cNvPr id="19" name="">
             <a:extLst xmlns:a="http://schemas.openxmlformats.org/drawingml/2006/main">
               <a:ext uri="{FF2B5EF4-FFF2-40B4-BE49-F238E27FC236}">
-                <a16:creationId xmlns:a16="http://schemas.microsoft.com/office/drawing/2014/main" id="{E68B9B27-FD23-4BE3-9877-1187EECBEF5B}"/>
+                <a16:creationId xmlns:a16="http://schemas.microsoft.com/office/drawing/2014/main" id="{9A65E05F-CDAA-400B-9422-C1B52BEC63EC}"/>
               </a:ext>
             </a:extLst>
           </p:cNvPr>
@@ -5214,7 +5214,7 @@
           <p:cNvPr id="20" name="">
             <a:extLst xmlns:a="http://schemas.openxmlformats.org/drawingml/2006/main">
               <a:ext uri="{FF2B5EF4-FFF2-40B4-BE49-F238E27FC236}">
-                <a16:creationId xmlns:a16="http://schemas.microsoft.com/office/drawing/2014/main" id="{C9F2B0B0-4DB6-4A44-AD7F-C5115906A76E}"/>
+                <a16:creationId xmlns:a16="http://schemas.microsoft.com/office/drawing/2014/main" id="{1A74FF35-D78E-49FF-9EC6-D776ADE15B72}"/>
               </a:ext>
             </a:extLst>
           </p:cNvPr>
@@ -5271,7 +5271,7 @@
           <p:cNvPr id="21" name="">
             <a:extLst xmlns:a="http://schemas.openxmlformats.org/drawingml/2006/main">
               <a:ext uri="{FF2B5EF4-FFF2-40B4-BE49-F238E27FC236}">
-                <a16:creationId xmlns:a16="http://schemas.microsoft.com/office/drawing/2014/main" id="{B2E889D7-9961-40CD-94E2-A0553A94A411}"/>
+                <a16:creationId xmlns:a16="http://schemas.microsoft.com/office/drawing/2014/main" id="{42469AEE-5610-4812-BE30-4F3EC7A7FF9C}"/>
               </a:ext>
             </a:extLst>
           </p:cNvPr>
@@ -5328,7 +5328,7 @@
           <p:cNvPr id="22" name="">
             <a:extLst xmlns:a="http://schemas.openxmlformats.org/drawingml/2006/main">
               <a:ext uri="{FF2B5EF4-FFF2-40B4-BE49-F238E27FC236}">
-                <a16:creationId xmlns:a16="http://schemas.microsoft.com/office/drawing/2014/main" id="{8103EEB0-3B20-4D4A-91E1-6D91BAD178BD}"/>
+                <a16:creationId xmlns:a16="http://schemas.microsoft.com/office/drawing/2014/main" id="{F3E2DD1E-9AA3-42B9-82CE-B23701FC5965}"/>
               </a:ext>
             </a:extLst>
           </p:cNvPr>
@@ -5383,7 +5383,7 @@
     </p:spTree>
     <p:extLst>
       <p:ext uri="{BB962C8B-B14F-4D97-AF65-F5344CB8AC3E}">
-        <p14:creationId xmlns:p14="http://schemas.microsoft.com/office/powerpoint/2010/main" val="2018741029"/>
+        <p14:creationId xmlns:p14="http://schemas.microsoft.com/office/powerpoint/2010/main" val="536628480"/>
       </p:ext>
     </p:extLst>
   </p:cSld>
@@ -5584,7 +5584,7 @@
           <p:cNvPr id="23" name="">
             <a:extLst xmlns:a="http://schemas.openxmlformats.org/drawingml/2006/main">
               <a:ext uri="{FF2B5EF4-FFF2-40B4-BE49-F238E27FC236}">
-                <a16:creationId xmlns:a16="http://schemas.microsoft.com/office/drawing/2014/main" id="{8E302209-DCCB-46C3-9408-FF0E84D60898}"/>
+                <a16:creationId xmlns:a16="http://schemas.microsoft.com/office/drawing/2014/main" id="{33A738A4-CE39-47D0-A5DD-D562CC5616EA}"/>
               </a:ext>
             </a:extLst>
           </p:cNvPr>
@@ -5616,7 +5616,7 @@
           <p:cNvPr id="2" name="">
             <a:extLst xmlns:a="http://schemas.openxmlformats.org/drawingml/2006/main">
               <a:ext uri="{FF2B5EF4-FFF2-40B4-BE49-F238E27FC236}">
-                <a16:creationId xmlns:a16="http://schemas.microsoft.com/office/drawing/2014/main" id="{A29A367E-4512-4A16-A564-56943ABD93BE}"/>
+                <a16:creationId xmlns:a16="http://schemas.microsoft.com/office/drawing/2014/main" id="{74152A11-FF19-4823-9579-B04930EC4229}"/>
               </a:ext>
             </a:extLst>
           </p:cNvPr>
@@ -5673,7 +5673,7 @@
           <p:cNvPr id="3" name="">
             <a:extLst xmlns:a="http://schemas.openxmlformats.org/drawingml/2006/main">
               <a:ext uri="{FF2B5EF4-FFF2-40B4-BE49-F238E27FC236}">
-                <a16:creationId xmlns:a16="http://schemas.microsoft.com/office/drawing/2014/main" id="{34D95B2C-D7EF-49F4-A98C-34543ED4B686}"/>
+                <a16:creationId xmlns:a16="http://schemas.microsoft.com/office/drawing/2014/main" id="{16B84761-3772-4871-8DA5-7B15DAC7D9CC}"/>
               </a:ext>
             </a:extLst>
           </p:cNvPr>
@@ -5705,7 +5705,7 @@
           <p:cNvPr id="4" name="">
             <a:extLst xmlns:a="http://schemas.openxmlformats.org/drawingml/2006/main">
               <a:ext uri="{FF2B5EF4-FFF2-40B4-BE49-F238E27FC236}">
-                <a16:creationId xmlns:a16="http://schemas.microsoft.com/office/drawing/2014/main" id="{4CC31EAD-39D9-4FDF-ACB8-BC1AC8938FEE}"/>
+                <a16:creationId xmlns:a16="http://schemas.microsoft.com/office/drawing/2014/main" id="{60E10DC5-F0CB-4685-B3E2-6112D9CD7CD6}"/>
               </a:ext>
             </a:extLst>
           </p:cNvPr>
@@ -5762,7 +5762,7 @@
           <p:cNvPr id="5" name="">
             <a:extLst xmlns:a="http://schemas.openxmlformats.org/drawingml/2006/main">
               <a:ext uri="{FF2B5EF4-FFF2-40B4-BE49-F238E27FC236}">
-                <a16:creationId xmlns:a16="http://schemas.microsoft.com/office/drawing/2014/main" id="{39289A41-7E42-4316-84D8-F40A24A96B6E}"/>
+                <a16:creationId xmlns:a16="http://schemas.microsoft.com/office/drawing/2014/main" id="{1717A510-2B99-46F7-A4EA-93A0EE5D9F27}"/>
               </a:ext>
             </a:extLst>
           </p:cNvPr>
@@ -5819,7 +5819,7 @@
           <p:cNvPr id="6" name="">
             <a:extLst xmlns:a="http://schemas.openxmlformats.org/drawingml/2006/main">
               <a:ext uri="{FF2B5EF4-FFF2-40B4-BE49-F238E27FC236}">
-                <a16:creationId xmlns:a16="http://schemas.microsoft.com/office/drawing/2014/main" id="{8B6CB7C3-27EE-4B90-960D-A78C9082501F}"/>
+                <a16:creationId xmlns:a16="http://schemas.microsoft.com/office/drawing/2014/main" id="{4657C054-E3F4-44AB-8389-952909F8FE1D}"/>
               </a:ext>
             </a:extLst>
           </p:cNvPr>
@@ -5876,7 +5876,7 @@
           <p:cNvPr id="7" name="">
             <a:extLst xmlns:a="http://schemas.openxmlformats.org/drawingml/2006/main">
               <a:ext uri="{FF2B5EF4-FFF2-40B4-BE49-F238E27FC236}">
-                <a16:creationId xmlns:a16="http://schemas.microsoft.com/office/drawing/2014/main" id="{38A2498D-301E-40C7-B4AE-665AB17E0B17}"/>
+                <a16:creationId xmlns:a16="http://schemas.microsoft.com/office/drawing/2014/main" id="{F1D61A56-BF1A-4BD4-92E3-39035628238B}"/>
               </a:ext>
             </a:extLst>
           </p:cNvPr>
@@ -5908,7 +5908,7 @@
           <p:cNvPr id="8" name="">
             <a:extLst xmlns:a="http://schemas.openxmlformats.org/drawingml/2006/main">
               <a:ext uri="{FF2B5EF4-FFF2-40B4-BE49-F238E27FC236}">
-                <a16:creationId xmlns:a16="http://schemas.microsoft.com/office/drawing/2014/main" id="{A79AD74F-F970-4824-9990-51C662E5CB38}"/>
+                <a16:creationId xmlns:a16="http://schemas.microsoft.com/office/drawing/2014/main" id="{7C2B3C0B-487A-47B3-A73F-3B26B4ADBC8C}"/>
               </a:ext>
             </a:extLst>
           </p:cNvPr>
@@ -5965,7 +5965,7 @@
           <p:cNvPr id="9" name="">
             <a:extLst xmlns:a="http://schemas.openxmlformats.org/drawingml/2006/main">
               <a:ext uri="{FF2B5EF4-FFF2-40B4-BE49-F238E27FC236}">
-                <a16:creationId xmlns:a16="http://schemas.microsoft.com/office/drawing/2014/main" id="{9879B5C6-14DF-4208-A529-F1637CC6D611}"/>
+                <a16:creationId xmlns:a16="http://schemas.microsoft.com/office/drawing/2014/main" id="{4FC0D406-84CE-4C25-9B65-7ABEBF581018}"/>
               </a:ext>
             </a:extLst>
           </p:cNvPr>
@@ -6022,7 +6022,7 @@
           <p:cNvPr id="10" name="">
             <a:extLst xmlns:a="http://schemas.openxmlformats.org/drawingml/2006/main">
               <a:ext uri="{FF2B5EF4-FFF2-40B4-BE49-F238E27FC236}">
-                <a16:creationId xmlns:a16="http://schemas.microsoft.com/office/drawing/2014/main" id="{15C131DD-D498-427E-956D-855FAEBBA767}"/>
+                <a16:creationId xmlns:a16="http://schemas.microsoft.com/office/drawing/2014/main" id="{D20E4173-4E7A-4703-AA6E-F8E32B3F7470}"/>
               </a:ext>
             </a:extLst>
           </p:cNvPr>
@@ -6056,7 +6056,7 @@
           <p:cNvPr id="11" name="">
             <a:extLst xmlns:a="http://schemas.openxmlformats.org/drawingml/2006/main">
               <a:ext uri="{FF2B5EF4-FFF2-40B4-BE49-F238E27FC236}">
-                <a16:creationId xmlns:a16="http://schemas.microsoft.com/office/drawing/2014/main" id="{F552CE05-B1FF-466E-AE10-68738DDD6B4B}"/>
+                <a16:creationId xmlns:a16="http://schemas.microsoft.com/office/drawing/2014/main" id="{C277DDBB-7567-417D-9EBB-1FEAD55C8543}"/>
               </a:ext>
             </a:extLst>
           </p:cNvPr>
@@ -6088,7 +6088,7 @@
           <p:cNvPr id="12" name="">
             <a:extLst xmlns:a="http://schemas.openxmlformats.org/drawingml/2006/main">
               <a:ext uri="{FF2B5EF4-FFF2-40B4-BE49-F238E27FC236}">
-                <a16:creationId xmlns:a16="http://schemas.microsoft.com/office/drawing/2014/main" id="{322F6F78-791C-4539-898B-F34145458FA2}"/>
+                <a16:creationId xmlns:a16="http://schemas.microsoft.com/office/drawing/2014/main" id="{C1DFE33E-2D2C-4A2D-B427-53B0540C6D43}"/>
               </a:ext>
             </a:extLst>
           </p:cNvPr>
@@ -6145,7 +6145,7 @@
           <p:cNvPr id="13" name="">
             <a:extLst xmlns:a="http://schemas.openxmlformats.org/drawingml/2006/main">
               <a:ext uri="{FF2B5EF4-FFF2-40B4-BE49-F238E27FC236}">
-                <a16:creationId xmlns:a16="http://schemas.microsoft.com/office/drawing/2014/main" id="{A4AFB34D-0F0C-4382-8289-26CB7BB9E119}"/>
+                <a16:creationId xmlns:a16="http://schemas.microsoft.com/office/drawing/2014/main" id="{10055F0A-F2D2-4B56-AECF-27DC13E37CE6}"/>
               </a:ext>
             </a:extLst>
           </p:cNvPr>
@@ -6202,7 +6202,7 @@
           <p:cNvPr id="14" name="">
             <a:extLst xmlns:a="http://schemas.openxmlformats.org/drawingml/2006/main">
               <a:ext uri="{FF2B5EF4-FFF2-40B4-BE49-F238E27FC236}">
-                <a16:creationId xmlns:a16="http://schemas.microsoft.com/office/drawing/2014/main" id="{AD5323A6-7F2E-40CE-82B6-078C1B080CF5}"/>
+                <a16:creationId xmlns:a16="http://schemas.microsoft.com/office/drawing/2014/main" id="{C94BCF39-7598-48BC-BE36-3D5799896402}"/>
               </a:ext>
             </a:extLst>
           </p:cNvPr>
@@ -6236,7 +6236,7 @@
           <p:cNvPr id="15" name="">
             <a:extLst xmlns:a="http://schemas.openxmlformats.org/drawingml/2006/main">
               <a:ext uri="{FF2B5EF4-FFF2-40B4-BE49-F238E27FC236}">
-                <a16:creationId xmlns:a16="http://schemas.microsoft.com/office/drawing/2014/main" id="{5D4C4A99-7C04-482E-90B8-2E9699E02895}"/>
+                <a16:creationId xmlns:a16="http://schemas.microsoft.com/office/drawing/2014/main" id="{3E8ECABF-3200-42CB-8C61-233C9B43EC31}"/>
               </a:ext>
             </a:extLst>
           </p:cNvPr>
@@ -6268,7 +6268,7 @@
           <p:cNvPr id="16" name="">
             <a:extLst xmlns:a="http://schemas.openxmlformats.org/drawingml/2006/main">
               <a:ext uri="{FF2B5EF4-FFF2-40B4-BE49-F238E27FC236}">
-                <a16:creationId xmlns:a16="http://schemas.microsoft.com/office/drawing/2014/main" id="{FBD69B18-A1C3-4E49-A13F-0E54B686497C}"/>
+                <a16:creationId xmlns:a16="http://schemas.microsoft.com/office/drawing/2014/main" id="{575BFE81-428D-4571-B249-7E0CA819DA54}"/>
               </a:ext>
             </a:extLst>
           </p:cNvPr>
@@ -6325,7 +6325,7 @@
           <p:cNvPr id="17" name="">
             <a:extLst xmlns:a="http://schemas.openxmlformats.org/drawingml/2006/main">
               <a:ext uri="{FF2B5EF4-FFF2-40B4-BE49-F238E27FC236}">
-                <a16:creationId xmlns:a16="http://schemas.microsoft.com/office/drawing/2014/main" id="{B5F9FABC-53A4-4541-ABA8-F4751C7A1F3A}"/>
+                <a16:creationId xmlns:a16="http://schemas.microsoft.com/office/drawing/2014/main" id="{31ACFCDC-46CB-4526-83B0-623D1D86A484}"/>
               </a:ext>
             </a:extLst>
           </p:cNvPr>
@@ -6382,7 +6382,7 @@
           <p:cNvPr id="18" name="">
             <a:extLst xmlns:a="http://schemas.openxmlformats.org/drawingml/2006/main">
               <a:ext uri="{FF2B5EF4-FFF2-40B4-BE49-F238E27FC236}">
-                <a16:creationId xmlns:a16="http://schemas.microsoft.com/office/drawing/2014/main" id="{C49F0FD9-5683-42AF-A595-934E975D39A4}"/>
+                <a16:creationId xmlns:a16="http://schemas.microsoft.com/office/drawing/2014/main" id="{ADA5D7CB-A84E-4E52-B4AC-8524972281E2}"/>
               </a:ext>
             </a:extLst>
           </p:cNvPr>
@@ -6416,7 +6416,7 @@
           <p:cNvPr id="19" name="">
             <a:extLst xmlns:a="http://schemas.openxmlformats.org/drawingml/2006/main">
               <a:ext uri="{FF2B5EF4-FFF2-40B4-BE49-F238E27FC236}">
-                <a16:creationId xmlns:a16="http://schemas.microsoft.com/office/drawing/2014/main" id="{04C83389-AAE6-47BE-8024-6308827C67E2}"/>
+                <a16:creationId xmlns:a16="http://schemas.microsoft.com/office/drawing/2014/main" id="{AE4B425E-23D6-4954-AA97-74B0410F192F}"/>
               </a:ext>
             </a:extLst>
           </p:cNvPr>
@@ -6448,7 +6448,7 @@
           <p:cNvPr id="20" name="">
             <a:extLst xmlns:a="http://schemas.openxmlformats.org/drawingml/2006/main">
               <a:ext uri="{FF2B5EF4-FFF2-40B4-BE49-F238E27FC236}">
-                <a16:creationId xmlns:a16="http://schemas.microsoft.com/office/drawing/2014/main" id="{57DA05A2-B262-4F57-988C-45C7120E91DF}"/>
+                <a16:creationId xmlns:a16="http://schemas.microsoft.com/office/drawing/2014/main" id="{2852291A-716F-4260-85F2-5716DB267445}"/>
               </a:ext>
             </a:extLst>
           </p:cNvPr>
@@ -6505,7 +6505,7 @@
           <p:cNvPr id="21" name="">
             <a:extLst xmlns:a="http://schemas.openxmlformats.org/drawingml/2006/main">
               <a:ext uri="{FF2B5EF4-FFF2-40B4-BE49-F238E27FC236}">
-                <a16:creationId xmlns:a16="http://schemas.microsoft.com/office/drawing/2014/main" id="{74BD7018-C280-45B9-A645-DA154819A8C0}"/>
+                <a16:creationId xmlns:a16="http://schemas.microsoft.com/office/drawing/2014/main" id="{EFBF8A2C-48F4-4367-B57D-28153B2C2C93}"/>
               </a:ext>
             </a:extLst>
           </p:cNvPr>
@@ -6562,7 +6562,7 @@
           <p:cNvPr id="22" name="">
             <a:extLst xmlns:a="http://schemas.openxmlformats.org/drawingml/2006/main">
               <a:ext uri="{FF2B5EF4-FFF2-40B4-BE49-F238E27FC236}">
-                <a16:creationId xmlns:a16="http://schemas.microsoft.com/office/drawing/2014/main" id="{C09F20D5-2EF5-4139-8EF8-2F173B6569FD}"/>
+                <a16:creationId xmlns:a16="http://schemas.microsoft.com/office/drawing/2014/main" id="{F962FE82-7DB3-4F2D-BA20-E9E4C453E13C}"/>
               </a:ext>
             </a:extLst>
           </p:cNvPr>
@@ -6617,7 +6617,7 @@
     </p:spTree>
     <p:extLst>
       <p:ext uri="{BB962C8B-B14F-4D97-AF65-F5344CB8AC3E}">
-        <p14:creationId xmlns:p14="http://schemas.microsoft.com/office/powerpoint/2010/main" val="1956427270"/>
+        <p14:creationId xmlns:p14="http://schemas.microsoft.com/office/powerpoint/2010/main" val="743916017"/>
       </p:ext>
     </p:extLst>
   </p:cSld>
@@ -6818,7 +6818,7 @@
           <p:cNvPr id="16" name="">
             <a:extLst xmlns:a="http://schemas.openxmlformats.org/drawingml/2006/main">
               <a:ext uri="{FF2B5EF4-FFF2-40B4-BE49-F238E27FC236}">
-                <a16:creationId xmlns:a16="http://schemas.microsoft.com/office/drawing/2014/main" id="{C1A0E7D8-B904-4FD5-B246-1C11A27E9C49}"/>
+                <a16:creationId xmlns:a16="http://schemas.microsoft.com/office/drawing/2014/main" id="{BF33E1DE-66E0-48BE-9D68-263CAFD8C489}"/>
               </a:ext>
             </a:extLst>
           </p:cNvPr>
@@ -6850,7 +6850,7 @@
           <p:cNvPr id="2" name="">
             <a:extLst xmlns:a="http://schemas.openxmlformats.org/drawingml/2006/main">
               <a:ext uri="{FF2B5EF4-FFF2-40B4-BE49-F238E27FC236}">
-                <a16:creationId xmlns:a16="http://schemas.microsoft.com/office/drawing/2014/main" id="{BF027D35-3B27-4614-8848-7477485DFFC5}"/>
+                <a16:creationId xmlns:a16="http://schemas.microsoft.com/office/drawing/2014/main" id="{597F002C-C175-4D16-9AA4-75F79755BB20}"/>
               </a:ext>
             </a:extLst>
           </p:cNvPr>
@@ -6907,7 +6907,7 @@
           <p:cNvPr id="3" name="">
             <a:extLst xmlns:a="http://schemas.openxmlformats.org/drawingml/2006/main">
               <a:ext uri="{FF2B5EF4-FFF2-40B4-BE49-F238E27FC236}">
-                <a16:creationId xmlns:a16="http://schemas.microsoft.com/office/drawing/2014/main" id="{9A614537-FCB3-492C-B9E7-51303D3B1AD2}"/>
+                <a16:creationId xmlns:a16="http://schemas.microsoft.com/office/drawing/2014/main" id="{457DB35E-5998-4D50-A52F-F1B8FDC87D96}"/>
               </a:ext>
             </a:extLst>
           </p:cNvPr>
@@ -6939,7 +6939,7 @@
           <p:cNvPr id="4" name="">
             <a:extLst xmlns:a="http://schemas.openxmlformats.org/drawingml/2006/main">
               <a:ext uri="{FF2B5EF4-FFF2-40B4-BE49-F238E27FC236}">
-                <a16:creationId xmlns:a16="http://schemas.microsoft.com/office/drawing/2014/main" id="{6E50D38D-E25E-47C5-918D-76416A62AC4A}"/>
+                <a16:creationId xmlns:a16="http://schemas.microsoft.com/office/drawing/2014/main" id="{0BF75AB4-ED9A-4954-8923-A6D5CDE6A702}"/>
               </a:ext>
             </a:extLst>
           </p:cNvPr>
@@ -6996,7 +6996,7 @@
           <p:cNvPr id="5" name="">
             <a:extLst xmlns:a="http://schemas.openxmlformats.org/drawingml/2006/main">
               <a:ext uri="{FF2B5EF4-FFF2-40B4-BE49-F238E27FC236}">
-                <a16:creationId xmlns:a16="http://schemas.microsoft.com/office/drawing/2014/main" id="{532F9901-E03D-4951-8BAF-FA4AC933977A}"/>
+                <a16:creationId xmlns:a16="http://schemas.microsoft.com/office/drawing/2014/main" id="{C6543E3F-0EED-4EC3-87B0-A91FA0440A1C}"/>
               </a:ext>
             </a:extLst>
           </p:cNvPr>
@@ -7053,7 +7053,7 @@
           <p:cNvPr id="6" name="">
             <a:extLst xmlns:a="http://schemas.openxmlformats.org/drawingml/2006/main">
               <a:ext uri="{FF2B5EF4-FFF2-40B4-BE49-F238E27FC236}">
-                <a16:creationId xmlns:a16="http://schemas.microsoft.com/office/drawing/2014/main" id="{66CAA13A-3AEA-417D-82E9-1D5A1F1D9905}"/>
+                <a16:creationId xmlns:a16="http://schemas.microsoft.com/office/drawing/2014/main" id="{3220A577-A025-4945-8276-DFEE53D376A9}"/>
               </a:ext>
             </a:extLst>
           </p:cNvPr>
@@ -7110,7 +7110,7 @@
           <p:cNvPr id="7" name="">
             <a:extLst xmlns:a="http://schemas.openxmlformats.org/drawingml/2006/main">
               <a:ext uri="{FF2B5EF4-FFF2-40B4-BE49-F238E27FC236}">
-                <a16:creationId xmlns:a16="http://schemas.microsoft.com/office/drawing/2014/main" id="{C7FC2856-EABB-4773-B3EE-13859D5BCEE4}"/>
+                <a16:creationId xmlns:a16="http://schemas.microsoft.com/office/drawing/2014/main" id="{BE76862E-F404-43D9-AEC4-2B396646FF29}"/>
               </a:ext>
             </a:extLst>
           </p:cNvPr>
@@ -7142,7 +7142,7 @@
           <p:cNvPr id="8" name="">
             <a:extLst xmlns:a="http://schemas.openxmlformats.org/drawingml/2006/main">
               <a:ext uri="{FF2B5EF4-FFF2-40B4-BE49-F238E27FC236}">
-                <a16:creationId xmlns:a16="http://schemas.microsoft.com/office/drawing/2014/main" id="{7E7B231E-0BEF-4DFD-A7AA-E598613683BF}"/>
+                <a16:creationId xmlns:a16="http://schemas.microsoft.com/office/drawing/2014/main" id="{B2A34520-4870-4999-B711-0D1016DE5B69}"/>
               </a:ext>
             </a:extLst>
           </p:cNvPr>
@@ -7199,7 +7199,7 @@
           <p:cNvPr id="9" name="">
             <a:extLst xmlns:a="http://schemas.openxmlformats.org/drawingml/2006/main">
               <a:ext uri="{FF2B5EF4-FFF2-40B4-BE49-F238E27FC236}">
-                <a16:creationId xmlns:a16="http://schemas.microsoft.com/office/drawing/2014/main" id="{0826698E-8BEB-4933-8AE0-21FDBF88AB9E}"/>
+                <a16:creationId xmlns:a16="http://schemas.microsoft.com/office/drawing/2014/main" id="{1F5A31BB-C0F4-4D32-B42A-C0E8C54C34D2}"/>
               </a:ext>
             </a:extLst>
           </p:cNvPr>
@@ -7256,7 +7256,7 @@
           <p:cNvPr id="10" name="">
             <a:extLst xmlns:a="http://schemas.openxmlformats.org/drawingml/2006/main">
               <a:ext uri="{FF2B5EF4-FFF2-40B4-BE49-F238E27FC236}">
-                <a16:creationId xmlns:a16="http://schemas.microsoft.com/office/drawing/2014/main" id="{7F13D6F1-EB6C-4EDB-ACB6-83C3B5F7D2D3}"/>
+                <a16:creationId xmlns:a16="http://schemas.microsoft.com/office/drawing/2014/main" id="{3C93436F-D444-4FF9-96B6-54BDF810D56E}"/>
               </a:ext>
             </a:extLst>
           </p:cNvPr>
@@ -7313,7 +7313,7 @@
           <p:cNvPr id="11" name="">
             <a:extLst xmlns:a="http://schemas.openxmlformats.org/drawingml/2006/main">
               <a:ext uri="{FF2B5EF4-FFF2-40B4-BE49-F238E27FC236}">
-                <a16:creationId xmlns:a16="http://schemas.microsoft.com/office/drawing/2014/main" id="{F1703249-00DE-45A6-9360-7D608156D55C}"/>
+                <a16:creationId xmlns:a16="http://schemas.microsoft.com/office/drawing/2014/main" id="{B266872A-6656-4F2D-BC34-FF6AFF6A97B6}"/>
               </a:ext>
             </a:extLst>
           </p:cNvPr>
@@ -7345,7 +7345,7 @@
           <p:cNvPr id="12" name="">
             <a:extLst xmlns:a="http://schemas.openxmlformats.org/drawingml/2006/main">
               <a:ext uri="{FF2B5EF4-FFF2-40B4-BE49-F238E27FC236}">
-                <a16:creationId xmlns:a16="http://schemas.microsoft.com/office/drawing/2014/main" id="{CFA8D64D-0F69-4812-AF31-FE5644DB79A4}"/>
+                <a16:creationId xmlns:a16="http://schemas.microsoft.com/office/drawing/2014/main" id="{B2928FA6-A265-4014-A6C8-C7C5A230D117}"/>
               </a:ext>
             </a:extLst>
           </p:cNvPr>
@@ -7402,7 +7402,7 @@
           <p:cNvPr id="13" name="">
             <a:extLst xmlns:a="http://schemas.openxmlformats.org/drawingml/2006/main">
               <a:ext uri="{FF2B5EF4-FFF2-40B4-BE49-F238E27FC236}">
-                <a16:creationId xmlns:a16="http://schemas.microsoft.com/office/drawing/2014/main" id="{E275B634-326A-4CA6-8177-B19050C00838}"/>
+                <a16:creationId xmlns:a16="http://schemas.microsoft.com/office/drawing/2014/main" id="{77E2692B-6D60-4583-AFCC-8752C242F660}"/>
               </a:ext>
             </a:extLst>
           </p:cNvPr>
@@ -7459,7 +7459,7 @@
           <p:cNvPr id="14" name="">
             <a:extLst xmlns:a="http://schemas.openxmlformats.org/drawingml/2006/main">
               <a:ext uri="{FF2B5EF4-FFF2-40B4-BE49-F238E27FC236}">
-                <a16:creationId xmlns:a16="http://schemas.microsoft.com/office/drawing/2014/main" id="{5D88F437-471B-4792-91B7-FD9B00BC5287}"/>
+                <a16:creationId xmlns:a16="http://schemas.microsoft.com/office/drawing/2014/main" id="{FA7D6BBA-1E1D-456F-9D76-561E6BFB11FD}"/>
               </a:ext>
             </a:extLst>
           </p:cNvPr>
@@ -7516,7 +7516,7 @@
           <p:cNvPr id="15" name="">
             <a:extLst xmlns:a="http://schemas.openxmlformats.org/drawingml/2006/main">
               <a:ext uri="{FF2B5EF4-FFF2-40B4-BE49-F238E27FC236}">
-                <a16:creationId xmlns:a16="http://schemas.microsoft.com/office/drawing/2014/main" id="{F9C079D1-D92D-4D5B-919E-CAC60728DEFF}"/>
+                <a16:creationId xmlns:a16="http://schemas.microsoft.com/office/drawing/2014/main" id="{BCE2F956-1915-46A8-8DC2-2935BB60AE6C}"/>
               </a:ext>
             </a:extLst>
           </p:cNvPr>
@@ -7571,7 +7571,7 @@
     </p:spTree>
     <p:extLst>
       <p:ext uri="{BB962C8B-B14F-4D97-AF65-F5344CB8AC3E}">
-        <p14:creationId xmlns:p14="http://schemas.microsoft.com/office/powerpoint/2010/main" val="1953619425"/>
+        <p14:creationId xmlns:p14="http://schemas.microsoft.com/office/powerpoint/2010/main" val="944661374"/>
       </p:ext>
     </p:extLst>
   </p:cSld>
@@ -7772,7 +7772,7 @@
           <p:cNvPr id="23" name="">
             <a:extLst xmlns:a="http://schemas.openxmlformats.org/drawingml/2006/main">
               <a:ext uri="{FF2B5EF4-FFF2-40B4-BE49-F238E27FC236}">
-                <a16:creationId xmlns:a16="http://schemas.microsoft.com/office/drawing/2014/main" id="{6339D3B5-4F7F-4639-8029-3E511323BE61}"/>
+                <a16:creationId xmlns:a16="http://schemas.microsoft.com/office/drawing/2014/main" id="{B81A04AD-471F-4BBA-BDD2-867416975996}"/>
               </a:ext>
             </a:extLst>
           </p:cNvPr>
@@ -7804,7 +7804,7 @@
           <p:cNvPr id="2" name="">
             <a:extLst xmlns:a="http://schemas.openxmlformats.org/drawingml/2006/main">
               <a:ext uri="{FF2B5EF4-FFF2-40B4-BE49-F238E27FC236}">
-                <a16:creationId xmlns:a16="http://schemas.microsoft.com/office/drawing/2014/main" id="{1122AD27-EDAE-4446-8523-D7F19A868DFD}"/>
+                <a16:creationId xmlns:a16="http://schemas.microsoft.com/office/drawing/2014/main" id="{EFD82491-3976-40EE-80C4-9C8F4EA06600}"/>
               </a:ext>
             </a:extLst>
           </p:cNvPr>
@@ -7861,7 +7861,7 @@
           <p:cNvPr id="3" name="">
             <a:extLst xmlns:a="http://schemas.openxmlformats.org/drawingml/2006/main">
               <a:ext uri="{FF2B5EF4-FFF2-40B4-BE49-F238E27FC236}">
-                <a16:creationId xmlns:a16="http://schemas.microsoft.com/office/drawing/2014/main" id="{F345E824-DB42-4A68-99BA-ED0DECE14DE2}"/>
+                <a16:creationId xmlns:a16="http://schemas.microsoft.com/office/drawing/2014/main" id="{18F23269-0174-4FA2-A796-3707AE3E472F}"/>
               </a:ext>
             </a:extLst>
           </p:cNvPr>
@@ -7893,7 +7893,7 @@
           <p:cNvPr id="4" name="">
             <a:extLst xmlns:a="http://schemas.openxmlformats.org/drawingml/2006/main">
               <a:ext uri="{FF2B5EF4-FFF2-40B4-BE49-F238E27FC236}">
-                <a16:creationId xmlns:a16="http://schemas.microsoft.com/office/drawing/2014/main" id="{19D9C4AF-3A80-44EB-8065-F77DE841A4DC}"/>
+                <a16:creationId xmlns:a16="http://schemas.microsoft.com/office/drawing/2014/main" id="{A04935F9-2F61-4834-B30A-9F86BCA8B047}"/>
               </a:ext>
             </a:extLst>
           </p:cNvPr>
@@ -7950,7 +7950,7 @@
           <p:cNvPr id="5" name="">
             <a:extLst xmlns:a="http://schemas.openxmlformats.org/drawingml/2006/main">
               <a:ext uri="{FF2B5EF4-FFF2-40B4-BE49-F238E27FC236}">
-                <a16:creationId xmlns:a16="http://schemas.microsoft.com/office/drawing/2014/main" id="{3B539665-82AE-4E56-95B6-B6D7761CAF44}"/>
+                <a16:creationId xmlns:a16="http://schemas.microsoft.com/office/drawing/2014/main" id="{F10E5B2F-7699-4021-8C5A-55068B06B08A}"/>
               </a:ext>
             </a:extLst>
           </p:cNvPr>
@@ -8007,7 +8007,7 @@
           <p:cNvPr id="6" name="">
             <a:extLst xmlns:a="http://schemas.openxmlformats.org/drawingml/2006/main">
               <a:ext uri="{FF2B5EF4-FFF2-40B4-BE49-F238E27FC236}">
-                <a16:creationId xmlns:a16="http://schemas.microsoft.com/office/drawing/2014/main" id="{0C4E144E-D185-4398-B915-B1CDC1FE9946}"/>
+                <a16:creationId xmlns:a16="http://schemas.microsoft.com/office/drawing/2014/main" id="{329DA698-82BB-49B5-BB38-4479C4DCBAEE}"/>
               </a:ext>
             </a:extLst>
           </p:cNvPr>
@@ -8064,7 +8064,7 @@
           <p:cNvPr id="7" name="">
             <a:extLst xmlns:a="http://schemas.openxmlformats.org/drawingml/2006/main">
               <a:ext uri="{FF2B5EF4-FFF2-40B4-BE49-F238E27FC236}">
-                <a16:creationId xmlns:a16="http://schemas.microsoft.com/office/drawing/2014/main" id="{77078EB4-7113-4F07-9DB1-9A6A4E98560B}"/>
+                <a16:creationId xmlns:a16="http://schemas.microsoft.com/office/drawing/2014/main" id="{7276B7E4-5807-4BF4-B3E3-D9E70CCA723E}"/>
               </a:ext>
             </a:extLst>
           </p:cNvPr>
@@ -8096,7 +8096,7 @@
           <p:cNvPr id="8" name="">
             <a:extLst xmlns:a="http://schemas.openxmlformats.org/drawingml/2006/main">
               <a:ext uri="{FF2B5EF4-FFF2-40B4-BE49-F238E27FC236}">
-                <a16:creationId xmlns:a16="http://schemas.microsoft.com/office/drawing/2014/main" id="{5DE3A317-69E9-45E6-86D3-1986AD0F9E1C}"/>
+                <a16:creationId xmlns:a16="http://schemas.microsoft.com/office/drawing/2014/main" id="{86665315-EA78-4576-AE3E-32F5B96B2B5C}"/>
               </a:ext>
             </a:extLst>
           </p:cNvPr>
@@ -8153,7 +8153,7 @@
           <p:cNvPr id="9" name="">
             <a:extLst xmlns:a="http://schemas.openxmlformats.org/drawingml/2006/main">
               <a:ext uri="{FF2B5EF4-FFF2-40B4-BE49-F238E27FC236}">
-                <a16:creationId xmlns:a16="http://schemas.microsoft.com/office/drawing/2014/main" id="{25F306EB-FB75-4A39-868E-03495E756EC5}"/>
+                <a16:creationId xmlns:a16="http://schemas.microsoft.com/office/drawing/2014/main" id="{4ED2AC78-0176-4FAF-937B-4BE8C84D96F4}"/>
               </a:ext>
             </a:extLst>
           </p:cNvPr>
@@ -8210,19 +8210,19 @@
           <p:cNvPr id="10" name="">
             <a:extLst xmlns:a="http://schemas.openxmlformats.org/drawingml/2006/main">
               <a:ext uri="{FF2B5EF4-FFF2-40B4-BE49-F238E27FC236}">
-                <a16:creationId xmlns:a16="http://schemas.microsoft.com/office/drawing/2014/main" id="{FF43C224-31C7-4C61-93F5-B9A89AF60496}"/>
-              </a:ext>
-            </a:extLst>
-          </p:cNvPr>
-          <p:cNvSpPr>
-            <a:spLocks xmlns:a="http://schemas.openxmlformats.org/drawingml/2006/main" noGrp="1"/>
-          </p:cNvSpPr>
-          <p:nvPr/>
-        </p:nvSpPr>
-        <p:spPr>
-          <a:xfrm xmlns:a="http://schemas.openxmlformats.org/drawingml/2006/main">
-            <a:off x="914400" y="1257300"/>
-            <a:ext cx="10363200" cy="781050"/>
+                <a16:creationId xmlns:a16="http://schemas.microsoft.com/office/drawing/2014/main" id="{15BBA2AB-4A47-4467-9B62-FCD17EF7D031}"/>
+              </a:ext>
+            </a:extLst>
+          </p:cNvPr>
+          <p:cNvSpPr>
+            <a:spLocks xmlns:a="http://schemas.openxmlformats.org/drawingml/2006/main" noGrp="1"/>
+          </p:cNvSpPr>
+          <p:nvPr/>
+        </p:nvSpPr>
+        <p:spPr>
+          <a:xfrm xmlns:a="http://schemas.openxmlformats.org/drawingml/2006/main">
+            <a:off x="857250" y="1219200"/>
+            <a:ext cx="10477500" cy="742950"/>
           </a:xfrm>
           <a:prstGeom xmlns:a="http://schemas.openxmlformats.org/drawingml/2006/main" prst="rect">
             <a:avLst/>
@@ -8239,7 +8239,7 @@
           <a:lstStyle xmlns:a="http://schemas.openxmlformats.org/drawingml/2006/main"/>
           <a:p xmlns:a="http://schemas.openxmlformats.org/drawingml/2006/main">
             <a:pPr algn="ctr">
-              <a:defRPr sz="2175" b="1">
+              <a:defRPr sz="2100" b="1">
                 <a:solidFill>
                   <a:srgbClr val="17253A"/>
                 </a:solidFill>
@@ -8249,7 +8249,7 @@
               </a:defRPr>
             </a:pPr>
             <a:r>
-              <a:rPr sz="2175" b="1">
+              <a:rPr sz="2100" b="1">
                 <a:solidFill>
                   <a:srgbClr val="17253A"/>
                 </a:solidFill>
@@ -8267,28 +8267,30 @@
           <p:cNvPr id="11" name="">
             <a:extLst xmlns:a="http://schemas.openxmlformats.org/drawingml/2006/main">
               <a:ext uri="{FF2B5EF4-FFF2-40B4-BE49-F238E27FC236}">
-                <a16:creationId xmlns:a16="http://schemas.microsoft.com/office/drawing/2014/main" id="{81F1EFC7-E4A5-462D-8746-E2B6E6B0DA75}"/>
-              </a:ext>
-            </a:extLst>
-          </p:cNvPr>
-          <p:cNvSpPr>
-            <a:spLocks xmlns:a="http://schemas.openxmlformats.org/drawingml/2006/main" noGrp="1"/>
-          </p:cNvSpPr>
-          <p:nvPr/>
-        </p:nvSpPr>
-        <p:spPr>
-          <a:xfrm xmlns:a="http://schemas.openxmlformats.org/drawingml/2006/main">
-            <a:off x="1000125" y="2247900"/>
-            <a:ext cx="476250" cy="476250"/>
-          </a:xfrm>
-          <a:prstGeom xmlns:a="http://schemas.openxmlformats.org/drawingml/2006/main" prst="ellipse">
+                <a16:creationId xmlns:a16="http://schemas.microsoft.com/office/drawing/2014/main" id="{59BBB288-59DE-4E17-8BD0-C59DE7757FAF}"/>
+              </a:ext>
+            </a:extLst>
+          </p:cNvPr>
+          <p:cNvSpPr>
+            <a:spLocks xmlns:a="http://schemas.openxmlformats.org/drawingml/2006/main" noGrp="1"/>
+          </p:cNvSpPr>
+          <p:nvPr/>
+        </p:nvSpPr>
+        <p:spPr>
+          <a:xfrm xmlns:a="http://schemas.openxmlformats.org/drawingml/2006/main">
+            <a:off x="971550" y="2124075"/>
+            <a:ext cx="38100" cy="3524250"/>
+          </a:xfrm>
+          <a:prstGeom xmlns:a="http://schemas.openxmlformats.org/drawingml/2006/main" prst="rect">
             <a:avLst/>
           </a:prstGeom>
           <a:solidFill xmlns:a="http://schemas.openxmlformats.org/drawingml/2006/main">
-            <a:srgbClr val="18324A"/>
+            <a:srgbClr val="2C6E73"/>
           </a:solidFill>
           <a:ln xmlns:a="http://schemas.openxmlformats.org/drawingml/2006/main" w="0">
-            <a:noFill/>
+            <a:solidFill>
+              <a:srgbClr val="2C6E73"/>
+            </a:solidFill>
           </a:ln>
         </p:spPr>
       </p:sp>
@@ -8297,19 +8299,19 @@
           <p:cNvPr id="12" name="">
             <a:extLst xmlns:a="http://schemas.openxmlformats.org/drawingml/2006/main">
               <a:ext uri="{FF2B5EF4-FFF2-40B4-BE49-F238E27FC236}">
-                <a16:creationId xmlns:a16="http://schemas.microsoft.com/office/drawing/2014/main" id="{EC986DCE-8BCE-4C2F-8A34-5E2D4849D2A3}"/>
-              </a:ext>
-            </a:extLst>
-          </p:cNvPr>
-          <p:cNvSpPr>
-            <a:spLocks xmlns:a="http://schemas.openxmlformats.org/drawingml/2006/main" noGrp="1"/>
-          </p:cNvSpPr>
-          <p:nvPr/>
-        </p:nvSpPr>
-        <p:spPr>
-          <a:xfrm xmlns:a="http://schemas.openxmlformats.org/drawingml/2006/main">
-            <a:off x="1000125" y="2276475"/>
-            <a:ext cx="476250" cy="419100"/>
+                <a16:creationId xmlns:a16="http://schemas.microsoft.com/office/drawing/2014/main" id="{91F61BEC-8DAA-48BD-824B-AA664C675C5B}"/>
+              </a:ext>
+            </a:extLst>
+          </p:cNvPr>
+          <p:cNvSpPr>
+            <a:spLocks xmlns:a="http://schemas.openxmlformats.org/drawingml/2006/main" noGrp="1"/>
+          </p:cNvSpPr>
+          <p:nvPr/>
+        </p:nvSpPr>
+        <p:spPr>
+          <a:xfrm xmlns:a="http://schemas.openxmlformats.org/drawingml/2006/main">
+            <a:off x="1162050" y="2200275"/>
+            <a:ext cx="400050" cy="400050"/>
           </a:xfrm>
           <a:prstGeom xmlns:a="http://schemas.openxmlformats.org/drawingml/2006/main" prst="rect">
             <a:avLst/>
@@ -8326,9 +8328,9 @@
           <a:lstStyle xmlns:a="http://schemas.openxmlformats.org/drawingml/2006/main"/>
           <a:p xmlns:a="http://schemas.openxmlformats.org/drawingml/2006/main">
             <a:pPr algn="ctr">
-              <a:defRPr sz="1350" b="1">
-                <a:solidFill>
-                  <a:srgbClr val="FFFFFF"/>
+              <a:defRPr sz="1125" b="1">
+                <a:solidFill>
+                  <a:srgbClr val="2C6E73"/>
                 </a:solidFill>
                 <a:latin typeface="Arial"/>
                 <a:ea typeface="Arial"/>
@@ -8336,9 +8338,9 @@
               </a:defRPr>
             </a:pPr>
             <a:r>
-              <a:rPr sz="1350" b="1">
-                <a:solidFill>
-                  <a:srgbClr val="FFFFFF"/>
+              <a:rPr sz="1125" b="1">
+                <a:solidFill>
+                  <a:srgbClr val="2C6E73"/>
                 </a:solidFill>
                 <a:latin typeface="Arial"/>
                 <a:ea typeface="Arial"/>
@@ -8354,19 +8356,19 @@
           <p:cNvPr id="13" name="">
             <a:extLst xmlns:a="http://schemas.openxmlformats.org/drawingml/2006/main">
               <a:ext uri="{FF2B5EF4-FFF2-40B4-BE49-F238E27FC236}">
-                <a16:creationId xmlns:a16="http://schemas.microsoft.com/office/drawing/2014/main" id="{F62D5F03-9FFB-4C52-A2E2-342F33AA3F30}"/>
-              </a:ext>
-            </a:extLst>
-          </p:cNvPr>
-          <p:cNvSpPr>
-            <a:spLocks xmlns:a="http://schemas.openxmlformats.org/drawingml/2006/main" noGrp="1"/>
-          </p:cNvSpPr>
-          <p:nvPr/>
-        </p:nvSpPr>
-        <p:spPr>
-          <a:xfrm xmlns:a="http://schemas.openxmlformats.org/drawingml/2006/main">
-            <a:off x="1714500" y="2181225"/>
-            <a:ext cx="9429750" cy="609600"/>
+                <a16:creationId xmlns:a16="http://schemas.microsoft.com/office/drawing/2014/main" id="{0B77BE99-045C-4441-B505-048B128C70F0}"/>
+              </a:ext>
+            </a:extLst>
+          </p:cNvPr>
+          <p:cNvSpPr>
+            <a:spLocks xmlns:a="http://schemas.openxmlformats.org/drawingml/2006/main" noGrp="1"/>
+          </p:cNvSpPr>
+          <p:nvPr/>
+        </p:nvSpPr>
+        <p:spPr>
+          <a:xfrm xmlns:a="http://schemas.openxmlformats.org/drawingml/2006/main">
+            <a:off x="1714500" y="2114550"/>
+            <a:ext cx="9525000" cy="809625"/>
           </a:xfrm>
           <a:prstGeom xmlns:a="http://schemas.openxmlformats.org/drawingml/2006/main" prst="rect">
             <a:avLst/>
@@ -8383,7 +8385,7 @@
           <a:lstStyle xmlns:a="http://schemas.openxmlformats.org/drawingml/2006/main"/>
           <a:p xmlns:a="http://schemas.openxmlformats.org/drawingml/2006/main">
             <a:pPr algn="l">
-              <a:defRPr sz="1500" b="0">
+              <a:defRPr sz="1725" b="0">
                 <a:solidFill>
                   <a:srgbClr val="17253A"/>
                 </a:solidFill>
@@ -8393,7 +8395,7 @@
               </a:defRPr>
             </a:pPr>
             <a:r>
-              <a:rPr sz="1500" b="0">
+              <a:rPr sz="1725" b="0">
                 <a:solidFill>
                   <a:srgbClr val="17253A"/>
                 </a:solidFill>
@@ -8401,7 +8403,7 @@
                 <a:ea typeface="Arial"/>
                 <a:cs typeface="Arial"/>
               </a:rPr>
-              <a:t>Identify the structure: Write the conversion fact and identify whether the unit becomes larger or smaller.</a:t>
+              <a:t>12.5 m = 1,250 cm</a:t>
             </a:r>
           </a:p>
         </p:txBody>
@@ -8411,28 +8413,30 @@
           <p:cNvPr id="14" name="">
             <a:extLst xmlns:a="http://schemas.openxmlformats.org/drawingml/2006/main">
               <a:ext uri="{FF2B5EF4-FFF2-40B4-BE49-F238E27FC236}">
-                <a16:creationId xmlns:a16="http://schemas.microsoft.com/office/drawing/2014/main" id="{C908F5A7-87E8-4925-8703-9359FD106736}"/>
-              </a:ext>
-            </a:extLst>
-          </p:cNvPr>
-          <p:cNvSpPr>
-            <a:spLocks xmlns:a="http://schemas.openxmlformats.org/drawingml/2006/main" noGrp="1"/>
-          </p:cNvSpPr>
-          <p:nvPr/>
-        </p:nvSpPr>
-        <p:spPr>
-          <a:xfrm xmlns:a="http://schemas.openxmlformats.org/drawingml/2006/main">
-            <a:off x="1000125" y="2990850"/>
-            <a:ext cx="476250" cy="476250"/>
-          </a:xfrm>
-          <a:prstGeom xmlns:a="http://schemas.openxmlformats.org/drawingml/2006/main" prst="ellipse">
+                <a16:creationId xmlns:a16="http://schemas.microsoft.com/office/drawing/2014/main" id="{BEC13322-F91F-4423-AA97-5C633DA9E69A}"/>
+              </a:ext>
+            </a:extLst>
+          </p:cNvPr>
+          <p:cNvSpPr>
+            <a:spLocks xmlns:a="http://schemas.openxmlformats.org/drawingml/2006/main" noGrp="1"/>
+          </p:cNvSpPr>
+          <p:nvPr/>
+        </p:nvSpPr>
+        <p:spPr>
+          <a:xfrm xmlns:a="http://schemas.openxmlformats.org/drawingml/2006/main">
+            <a:off x="1714500" y="2943225"/>
+            <a:ext cx="9334500" cy="9525"/>
+          </a:xfrm>
+          <a:prstGeom xmlns:a="http://schemas.openxmlformats.org/drawingml/2006/main" prst="rect">
             <a:avLst/>
           </a:prstGeom>
           <a:solidFill xmlns:a="http://schemas.openxmlformats.org/drawingml/2006/main">
-            <a:srgbClr val="2C6E73"/>
+            <a:srgbClr val="D9E0E6"/>
           </a:solidFill>
           <a:ln xmlns:a="http://schemas.openxmlformats.org/drawingml/2006/main" w="0">
-            <a:noFill/>
+            <a:solidFill>
+              <a:srgbClr val="D9E0E6"/>
+            </a:solidFill>
           </a:ln>
         </p:spPr>
       </p:sp>
@@ -8441,19 +8445,19 @@
           <p:cNvPr id="15" name="">
             <a:extLst xmlns:a="http://schemas.openxmlformats.org/drawingml/2006/main">
               <a:ext uri="{FF2B5EF4-FFF2-40B4-BE49-F238E27FC236}">
-                <a16:creationId xmlns:a16="http://schemas.microsoft.com/office/drawing/2014/main" id="{B87BCD09-5E03-4069-B7E9-246BC2C48504}"/>
-              </a:ext>
-            </a:extLst>
-          </p:cNvPr>
-          <p:cNvSpPr>
-            <a:spLocks xmlns:a="http://schemas.openxmlformats.org/drawingml/2006/main" noGrp="1"/>
-          </p:cNvSpPr>
-          <p:nvPr/>
-        </p:nvSpPr>
-        <p:spPr>
-          <a:xfrm xmlns:a="http://schemas.openxmlformats.org/drawingml/2006/main">
-            <a:off x="1000125" y="3019425"/>
-            <a:ext cx="476250" cy="419100"/>
+                <a16:creationId xmlns:a16="http://schemas.microsoft.com/office/drawing/2014/main" id="{343EE1A4-9998-4299-94F0-345C6A4CD54D}"/>
+              </a:ext>
+            </a:extLst>
+          </p:cNvPr>
+          <p:cNvSpPr>
+            <a:spLocks xmlns:a="http://schemas.openxmlformats.org/drawingml/2006/main" noGrp="1"/>
+          </p:cNvSpPr>
+          <p:nvPr/>
+        </p:nvSpPr>
+        <p:spPr>
+          <a:xfrm xmlns:a="http://schemas.openxmlformats.org/drawingml/2006/main">
+            <a:off x="1162050" y="3076575"/>
+            <a:ext cx="400050" cy="400050"/>
           </a:xfrm>
           <a:prstGeom xmlns:a="http://schemas.openxmlformats.org/drawingml/2006/main" prst="rect">
             <a:avLst/>
@@ -8470,9 +8474,9 @@
           <a:lstStyle xmlns:a="http://schemas.openxmlformats.org/drawingml/2006/main"/>
           <a:p xmlns:a="http://schemas.openxmlformats.org/drawingml/2006/main">
             <a:pPr algn="ctr">
-              <a:defRPr sz="1350" b="1">
-                <a:solidFill>
-                  <a:srgbClr val="FFFFFF"/>
+              <a:defRPr sz="1125" b="1">
+                <a:solidFill>
+                  <a:srgbClr val="2C6E73"/>
                 </a:solidFill>
                 <a:latin typeface="Arial"/>
                 <a:ea typeface="Arial"/>
@@ -8480,9 +8484,9 @@
               </a:defRPr>
             </a:pPr>
             <a:r>
-              <a:rPr sz="1350" b="1">
-                <a:solidFill>
-                  <a:srgbClr val="FFFFFF"/>
+              <a:rPr sz="1125" b="1">
+                <a:solidFill>
+                  <a:srgbClr val="2C6E73"/>
                 </a:solidFill>
                 <a:latin typeface="Arial"/>
                 <a:ea typeface="Arial"/>
@@ -8498,19 +8502,19 @@
           <p:cNvPr id="16" name="">
             <a:extLst xmlns:a="http://schemas.openxmlformats.org/drawingml/2006/main">
               <a:ext uri="{FF2B5EF4-FFF2-40B4-BE49-F238E27FC236}">
-                <a16:creationId xmlns:a16="http://schemas.microsoft.com/office/drawing/2014/main" id="{D6C87F6B-F252-4853-A34E-C524E59C1AA7}"/>
-              </a:ext>
-            </a:extLst>
-          </p:cNvPr>
-          <p:cNvSpPr>
-            <a:spLocks xmlns:a="http://schemas.openxmlformats.org/drawingml/2006/main" noGrp="1"/>
-          </p:cNvSpPr>
-          <p:nvPr/>
-        </p:nvSpPr>
-        <p:spPr>
-          <a:xfrm xmlns:a="http://schemas.openxmlformats.org/drawingml/2006/main">
-            <a:off x="1714500" y="2924175"/>
-            <a:ext cx="9429750" cy="609600"/>
+                <a16:creationId xmlns:a16="http://schemas.microsoft.com/office/drawing/2014/main" id="{0E7AB024-84A6-47CE-A5F7-9E461046AEFB}"/>
+              </a:ext>
+            </a:extLst>
+          </p:cNvPr>
+          <p:cNvSpPr>
+            <a:spLocks xmlns:a="http://schemas.openxmlformats.org/drawingml/2006/main" noGrp="1"/>
+          </p:cNvSpPr>
+          <p:nvPr/>
+        </p:nvSpPr>
+        <p:spPr>
+          <a:xfrm xmlns:a="http://schemas.openxmlformats.org/drawingml/2006/main">
+            <a:off x="1714500" y="2990850"/>
+            <a:ext cx="9525000" cy="809625"/>
           </a:xfrm>
           <a:prstGeom xmlns:a="http://schemas.openxmlformats.org/drawingml/2006/main" prst="rect">
             <a:avLst/>
@@ -8527,7 +8531,7 @@
           <a:lstStyle xmlns:a="http://schemas.openxmlformats.org/drawingml/2006/main"/>
           <a:p xmlns:a="http://schemas.openxmlformats.org/drawingml/2006/main">
             <a:pPr algn="l">
-              <a:defRPr sz="1500" b="0">
+              <a:defRPr sz="1725" b="0">
                 <a:solidFill>
                   <a:srgbClr val="17253A"/>
                 </a:solidFill>
@@ -8537,7 +8541,7 @@
               </a:defRPr>
             </a:pPr>
             <a:r>
-              <a:rPr sz="1500" b="0">
+              <a:rPr sz="1725" b="0">
                 <a:solidFill>
                   <a:srgbClr val="17253A"/>
                 </a:solidFill>
@@ -8545,7 +8549,7 @@
                 <a:ea typeface="Arial"/>
                 <a:cs typeface="Arial"/>
               </a:rPr>
-              <a:t>Set up the method: Multiply or divide by the correct scale factor.</a:t>
+              <a:t>1,250 ÷ 40</a:t>
             </a:r>
           </a:p>
         </p:txBody>
@@ -8555,28 +8559,30 @@
           <p:cNvPr id="17" name="">
             <a:extLst xmlns:a="http://schemas.openxmlformats.org/drawingml/2006/main">
               <a:ext uri="{FF2B5EF4-FFF2-40B4-BE49-F238E27FC236}">
-                <a16:creationId xmlns:a16="http://schemas.microsoft.com/office/drawing/2014/main" id="{F1406C2E-9CE7-40B3-9D1E-E9737DF51B03}"/>
-              </a:ext>
-            </a:extLst>
-          </p:cNvPr>
-          <p:cNvSpPr>
-            <a:spLocks xmlns:a="http://schemas.openxmlformats.org/drawingml/2006/main" noGrp="1"/>
-          </p:cNvSpPr>
-          <p:nvPr/>
-        </p:nvSpPr>
-        <p:spPr>
-          <a:xfrm xmlns:a="http://schemas.openxmlformats.org/drawingml/2006/main">
-            <a:off x="1000125" y="3733800"/>
-            <a:ext cx="476250" cy="476250"/>
-          </a:xfrm>
-          <a:prstGeom xmlns:a="http://schemas.openxmlformats.org/drawingml/2006/main" prst="ellipse">
+                <a16:creationId xmlns:a16="http://schemas.microsoft.com/office/drawing/2014/main" id="{3740779D-802C-4944-8DA6-10D3A077B91D}"/>
+              </a:ext>
+            </a:extLst>
+          </p:cNvPr>
+          <p:cNvSpPr>
+            <a:spLocks xmlns:a="http://schemas.openxmlformats.org/drawingml/2006/main" noGrp="1"/>
+          </p:cNvSpPr>
+          <p:nvPr/>
+        </p:nvSpPr>
+        <p:spPr>
+          <a:xfrm xmlns:a="http://schemas.openxmlformats.org/drawingml/2006/main">
+            <a:off x="1714500" y="3819525"/>
+            <a:ext cx="9334500" cy="9525"/>
+          </a:xfrm>
+          <a:prstGeom xmlns:a="http://schemas.openxmlformats.org/drawingml/2006/main" prst="rect">
             <a:avLst/>
           </a:prstGeom>
           <a:solidFill xmlns:a="http://schemas.openxmlformats.org/drawingml/2006/main">
-            <a:srgbClr val="2C6E73"/>
+            <a:srgbClr val="D9E0E6"/>
           </a:solidFill>
           <a:ln xmlns:a="http://schemas.openxmlformats.org/drawingml/2006/main" w="0">
-            <a:noFill/>
+            <a:solidFill>
+              <a:srgbClr val="D9E0E6"/>
+            </a:solidFill>
           </a:ln>
         </p:spPr>
       </p:sp>
@@ -8585,19 +8591,19 @@
           <p:cNvPr id="18" name="">
             <a:extLst xmlns:a="http://schemas.openxmlformats.org/drawingml/2006/main">
               <a:ext uri="{FF2B5EF4-FFF2-40B4-BE49-F238E27FC236}">
-                <a16:creationId xmlns:a16="http://schemas.microsoft.com/office/drawing/2014/main" id="{938BF126-E23F-4BA7-A54D-F7A61F763C9D}"/>
-              </a:ext>
-            </a:extLst>
-          </p:cNvPr>
-          <p:cNvSpPr>
-            <a:spLocks xmlns:a="http://schemas.openxmlformats.org/drawingml/2006/main" noGrp="1"/>
-          </p:cNvSpPr>
-          <p:nvPr/>
-        </p:nvSpPr>
-        <p:spPr>
-          <a:xfrm xmlns:a="http://schemas.openxmlformats.org/drawingml/2006/main">
-            <a:off x="1000125" y="3762375"/>
-            <a:ext cx="476250" cy="419100"/>
+                <a16:creationId xmlns:a16="http://schemas.microsoft.com/office/drawing/2014/main" id="{02DB7D0D-3ADB-41BF-854B-447F6C4FEA19}"/>
+              </a:ext>
+            </a:extLst>
+          </p:cNvPr>
+          <p:cNvSpPr>
+            <a:spLocks xmlns:a="http://schemas.openxmlformats.org/drawingml/2006/main" noGrp="1"/>
+          </p:cNvSpPr>
+          <p:nvPr/>
+        </p:nvSpPr>
+        <p:spPr>
+          <a:xfrm xmlns:a="http://schemas.openxmlformats.org/drawingml/2006/main">
+            <a:off x="1162050" y="3952875"/>
+            <a:ext cx="400050" cy="400050"/>
           </a:xfrm>
           <a:prstGeom xmlns:a="http://schemas.openxmlformats.org/drawingml/2006/main" prst="rect">
             <a:avLst/>
@@ -8614,9 +8620,9 @@
           <a:lstStyle xmlns:a="http://schemas.openxmlformats.org/drawingml/2006/main"/>
           <a:p xmlns:a="http://schemas.openxmlformats.org/drawingml/2006/main">
             <a:pPr algn="ctr">
-              <a:defRPr sz="1350" b="1">
-                <a:solidFill>
-                  <a:srgbClr val="FFFFFF"/>
+              <a:defRPr sz="1125" b="1">
+                <a:solidFill>
+                  <a:srgbClr val="2C6E73"/>
                 </a:solidFill>
                 <a:latin typeface="Arial"/>
                 <a:ea typeface="Arial"/>
@@ -8624,9 +8630,9 @@
               </a:defRPr>
             </a:pPr>
             <a:r>
-              <a:rPr sz="1350" b="1">
-                <a:solidFill>
-                  <a:srgbClr val="FFFFFF"/>
+              <a:rPr sz="1125" b="1">
+                <a:solidFill>
+                  <a:srgbClr val="2C6E73"/>
                 </a:solidFill>
                 <a:latin typeface="Arial"/>
                 <a:ea typeface="Arial"/>
@@ -8642,19 +8648,19 @@
           <p:cNvPr id="19" name="">
             <a:extLst xmlns:a="http://schemas.openxmlformats.org/drawingml/2006/main">
               <a:ext uri="{FF2B5EF4-FFF2-40B4-BE49-F238E27FC236}">
-                <a16:creationId xmlns:a16="http://schemas.microsoft.com/office/drawing/2014/main" id="{61DBE6B6-2AA8-43F5-9E9F-60681B999872}"/>
-              </a:ext>
-            </a:extLst>
-          </p:cNvPr>
-          <p:cNvSpPr>
-            <a:spLocks xmlns:a="http://schemas.openxmlformats.org/drawingml/2006/main" noGrp="1"/>
-          </p:cNvSpPr>
-          <p:nvPr/>
-        </p:nvSpPr>
-        <p:spPr>
-          <a:xfrm xmlns:a="http://schemas.openxmlformats.org/drawingml/2006/main">
-            <a:off x="1714500" y="3667125"/>
-            <a:ext cx="9429750" cy="609600"/>
+                <a16:creationId xmlns:a16="http://schemas.microsoft.com/office/drawing/2014/main" id="{225F9DC2-3387-49C9-84CF-06E74F500214}"/>
+              </a:ext>
+            </a:extLst>
+          </p:cNvPr>
+          <p:cNvSpPr>
+            <a:spLocks xmlns:a="http://schemas.openxmlformats.org/drawingml/2006/main" noGrp="1"/>
+          </p:cNvSpPr>
+          <p:nvPr/>
+        </p:nvSpPr>
+        <p:spPr>
+          <a:xfrm xmlns:a="http://schemas.openxmlformats.org/drawingml/2006/main">
+            <a:off x="1714500" y="3867150"/>
+            <a:ext cx="9525000" cy="809625"/>
           </a:xfrm>
           <a:prstGeom xmlns:a="http://schemas.openxmlformats.org/drawingml/2006/main" prst="rect">
             <a:avLst/>
@@ -8671,7 +8677,7 @@
           <a:lstStyle xmlns:a="http://schemas.openxmlformats.org/drawingml/2006/main"/>
           <a:p xmlns:a="http://schemas.openxmlformats.org/drawingml/2006/main">
             <a:pPr algn="l">
-              <a:defRPr sz="1500" b="0">
+              <a:defRPr sz="1725" b="0">
                 <a:solidFill>
                   <a:srgbClr val="17253A"/>
                 </a:solidFill>
@@ -8681,7 +8687,7 @@
               </a:defRPr>
             </a:pPr>
             <a:r>
-              <a:rPr sz="1500" b="0">
+              <a:rPr sz="1725" b="0">
                 <a:solidFill>
                   <a:srgbClr val="17253A"/>
                 </a:solidFill>
@@ -8689,7 +8695,7 @@
                 <a:ea typeface="Arial"/>
                 <a:cs typeface="Arial"/>
               </a:rPr>
-              <a:t>Complete the calculation: 31 complete pieces, with 10 cm left.</a:t>
+              <a:t>40 × 31 = 1,240; remainder 10</a:t>
             </a:r>
           </a:p>
         </p:txBody>
@@ -8699,28 +8705,30 @@
           <p:cNvPr id="20" name="">
             <a:extLst xmlns:a="http://schemas.openxmlformats.org/drawingml/2006/main">
               <a:ext uri="{FF2B5EF4-FFF2-40B4-BE49-F238E27FC236}">
-                <a16:creationId xmlns:a16="http://schemas.microsoft.com/office/drawing/2014/main" id="{D3A29E5E-5983-4316-8DBA-E74A4C5B86A9}"/>
-              </a:ext>
-            </a:extLst>
-          </p:cNvPr>
-          <p:cNvSpPr>
-            <a:spLocks xmlns:a="http://schemas.openxmlformats.org/drawingml/2006/main" noGrp="1"/>
-          </p:cNvSpPr>
-          <p:nvPr/>
-        </p:nvSpPr>
-        <p:spPr>
-          <a:xfrm xmlns:a="http://schemas.openxmlformats.org/drawingml/2006/main">
-            <a:off x="1000125" y="4476750"/>
-            <a:ext cx="476250" cy="476250"/>
-          </a:xfrm>
-          <a:prstGeom xmlns:a="http://schemas.openxmlformats.org/drawingml/2006/main" prst="ellipse">
+                <a16:creationId xmlns:a16="http://schemas.microsoft.com/office/drawing/2014/main" id="{1C9C05C2-0146-40CF-AF57-090EEB22675B}"/>
+              </a:ext>
+            </a:extLst>
+          </p:cNvPr>
+          <p:cNvSpPr>
+            <a:spLocks xmlns:a="http://schemas.openxmlformats.org/drawingml/2006/main" noGrp="1"/>
+          </p:cNvSpPr>
+          <p:nvPr/>
+        </p:nvSpPr>
+        <p:spPr>
+          <a:xfrm xmlns:a="http://schemas.openxmlformats.org/drawingml/2006/main">
+            <a:off x="1714500" y="4695825"/>
+            <a:ext cx="9334500" cy="9525"/>
+          </a:xfrm>
+          <a:prstGeom xmlns:a="http://schemas.openxmlformats.org/drawingml/2006/main" prst="rect">
             <a:avLst/>
           </a:prstGeom>
           <a:solidFill xmlns:a="http://schemas.openxmlformats.org/drawingml/2006/main">
-            <a:srgbClr val="2C6E73"/>
+            <a:srgbClr val="D9E0E6"/>
           </a:solidFill>
           <a:ln xmlns:a="http://schemas.openxmlformats.org/drawingml/2006/main" w="0">
-            <a:noFill/>
+            <a:solidFill>
+              <a:srgbClr val="D9E0E6"/>
+            </a:solidFill>
           </a:ln>
         </p:spPr>
       </p:sp>
@@ -8729,19 +8737,19 @@
           <p:cNvPr id="21" name="">
             <a:extLst xmlns:a="http://schemas.openxmlformats.org/drawingml/2006/main">
               <a:ext uri="{FF2B5EF4-FFF2-40B4-BE49-F238E27FC236}">
-                <a16:creationId xmlns:a16="http://schemas.microsoft.com/office/drawing/2014/main" id="{ADA96619-426D-4F92-9982-F9A96BBE037C}"/>
-              </a:ext>
-            </a:extLst>
-          </p:cNvPr>
-          <p:cNvSpPr>
-            <a:spLocks xmlns:a="http://schemas.openxmlformats.org/drawingml/2006/main" noGrp="1"/>
-          </p:cNvSpPr>
-          <p:nvPr/>
-        </p:nvSpPr>
-        <p:spPr>
-          <a:xfrm xmlns:a="http://schemas.openxmlformats.org/drawingml/2006/main">
-            <a:off x="1000125" y="4505325"/>
-            <a:ext cx="476250" cy="419100"/>
+                <a16:creationId xmlns:a16="http://schemas.microsoft.com/office/drawing/2014/main" id="{7E0D1BB0-36CA-4143-816A-9FE2BA6CD364}"/>
+              </a:ext>
+            </a:extLst>
+          </p:cNvPr>
+          <p:cNvSpPr>
+            <a:spLocks xmlns:a="http://schemas.openxmlformats.org/drawingml/2006/main" noGrp="1"/>
+          </p:cNvSpPr>
+          <p:nvPr/>
+        </p:nvSpPr>
+        <p:spPr>
+          <a:xfrm xmlns:a="http://schemas.openxmlformats.org/drawingml/2006/main">
+            <a:off x="1162050" y="4829175"/>
+            <a:ext cx="400050" cy="400050"/>
           </a:xfrm>
           <a:prstGeom xmlns:a="http://schemas.openxmlformats.org/drawingml/2006/main" prst="rect">
             <a:avLst/>
@@ -8758,9 +8766,9 @@
           <a:lstStyle xmlns:a="http://schemas.openxmlformats.org/drawingml/2006/main"/>
           <a:p xmlns:a="http://schemas.openxmlformats.org/drawingml/2006/main">
             <a:pPr algn="ctr">
-              <a:defRPr sz="1350" b="1">
-                <a:solidFill>
-                  <a:srgbClr val="FFFFFF"/>
+              <a:defRPr sz="1125" b="1">
+                <a:solidFill>
+                  <a:srgbClr val="2F785D"/>
                 </a:solidFill>
                 <a:latin typeface="Arial"/>
                 <a:ea typeface="Arial"/>
@@ -8768,9 +8776,9 @@
               </a:defRPr>
             </a:pPr>
             <a:r>
-              <a:rPr sz="1350" b="1">
-                <a:solidFill>
-                  <a:srgbClr val="FFFFFF"/>
+              <a:rPr sz="1125" b="1">
+                <a:solidFill>
+                  <a:srgbClr val="2F785D"/>
                 </a:solidFill>
                 <a:latin typeface="Arial"/>
                 <a:ea typeface="Arial"/>
@@ -8786,19 +8794,19 @@
           <p:cNvPr id="22" name="">
             <a:extLst xmlns:a="http://schemas.openxmlformats.org/drawingml/2006/main">
               <a:ext uri="{FF2B5EF4-FFF2-40B4-BE49-F238E27FC236}">
-                <a16:creationId xmlns:a16="http://schemas.microsoft.com/office/drawing/2014/main" id="{BA06D165-F458-4C61-B658-F01D8B77F299}"/>
-              </a:ext>
-            </a:extLst>
-          </p:cNvPr>
-          <p:cNvSpPr>
-            <a:spLocks xmlns:a="http://schemas.openxmlformats.org/drawingml/2006/main" noGrp="1"/>
-          </p:cNvSpPr>
-          <p:nvPr/>
-        </p:nvSpPr>
-        <p:spPr>
-          <a:xfrm xmlns:a="http://schemas.openxmlformats.org/drawingml/2006/main">
-            <a:off x="1714500" y="4410075"/>
-            <a:ext cx="9429750" cy="609600"/>
+                <a16:creationId xmlns:a16="http://schemas.microsoft.com/office/drawing/2014/main" id="{6241B5A4-1064-4C68-BCD3-71A165B6FB73}"/>
+              </a:ext>
+            </a:extLst>
+          </p:cNvPr>
+          <p:cNvSpPr>
+            <a:spLocks xmlns:a="http://schemas.openxmlformats.org/drawingml/2006/main" noGrp="1"/>
+          </p:cNvSpPr>
+          <p:nvPr/>
+        </p:nvSpPr>
+        <p:spPr>
+          <a:xfrm xmlns:a="http://schemas.openxmlformats.org/drawingml/2006/main">
+            <a:off x="1714500" y="4743450"/>
+            <a:ext cx="9525000" cy="809625"/>
           </a:xfrm>
           <a:prstGeom xmlns:a="http://schemas.openxmlformats.org/drawingml/2006/main" prst="rect">
             <a:avLst/>
@@ -8815,7 +8823,7 @@
           <a:lstStyle xmlns:a="http://schemas.openxmlformats.org/drawingml/2006/main"/>
           <a:p xmlns:a="http://schemas.openxmlformats.org/drawingml/2006/main">
             <a:pPr algn="l">
-              <a:defRPr sz="1500" b="1">
+              <a:defRPr sz="1725" b="1">
                 <a:solidFill>
                   <a:srgbClr val="2F785D"/>
                 </a:solidFill>
@@ -8825,7 +8833,7 @@
               </a:defRPr>
             </a:pPr>
             <a:r>
-              <a:rPr sz="1500" b="1">
+              <a:rPr sz="1725" b="1">
                 <a:solidFill>
                   <a:srgbClr val="2F785D"/>
                 </a:solidFill>
@@ -8833,7 +8841,7 @@
                 <a:ea typeface="Arial"/>
                 <a:cs typeface="Arial"/>
               </a:rPr>
-              <a:t>Check the result: Attach the unit and check the answer's size in context.</a:t>
+              <a:t>31 complete pieces, 10 cm left</a:t>
             </a:r>
           </a:p>
         </p:txBody>
@@ -8841,7 +8849,7 @@
     </p:spTree>
     <p:extLst>
       <p:ext uri="{BB962C8B-B14F-4D97-AF65-F5344CB8AC3E}">
-        <p14:creationId xmlns:p14="http://schemas.microsoft.com/office/powerpoint/2010/main" val="634938954"/>
+        <p14:creationId xmlns:p14="http://schemas.microsoft.com/office/powerpoint/2010/main" val="442530332"/>
       </p:ext>
     </p:extLst>
   </p:cSld>
@@ -9134,7 +9142,7 @@
           <p:cNvPr id="15" name="">
             <a:extLst xmlns:a="http://schemas.openxmlformats.org/drawingml/2006/main">
               <a:ext uri="{FF2B5EF4-FFF2-40B4-BE49-F238E27FC236}">
-                <a16:creationId xmlns:a16="http://schemas.microsoft.com/office/drawing/2014/main" id="{F660D0E9-2389-4D01-B8F2-0AB2A2B4866D}"/>
+                <a16:creationId xmlns:a16="http://schemas.microsoft.com/office/drawing/2014/main" id="{47FC65DA-C524-46B6-B5E4-BCA8C410F8EC}"/>
               </a:ext>
             </a:extLst>
           </p:cNvPr>
@@ -9166,7 +9174,7 @@
           <p:cNvPr id="2" name="">
             <a:extLst xmlns:a="http://schemas.openxmlformats.org/drawingml/2006/main">
               <a:ext uri="{FF2B5EF4-FFF2-40B4-BE49-F238E27FC236}">
-                <a16:creationId xmlns:a16="http://schemas.microsoft.com/office/drawing/2014/main" id="{C653D9AB-4514-4F22-82AE-AFC669831879}"/>
+                <a16:creationId xmlns:a16="http://schemas.microsoft.com/office/drawing/2014/main" id="{3C8B165F-82F8-4C30-B632-C0B9E6E1D56F}"/>
               </a:ext>
             </a:extLst>
           </p:cNvPr>
@@ -9223,7 +9231,7 @@
           <p:cNvPr id="3" name="">
             <a:extLst xmlns:a="http://schemas.openxmlformats.org/drawingml/2006/main">
               <a:ext uri="{FF2B5EF4-FFF2-40B4-BE49-F238E27FC236}">
-                <a16:creationId xmlns:a16="http://schemas.microsoft.com/office/drawing/2014/main" id="{0A714267-5FC0-4DF9-A565-82F53671176B}"/>
+                <a16:creationId xmlns:a16="http://schemas.microsoft.com/office/drawing/2014/main" id="{B4910F35-B828-4268-BBCA-FAFC441EAD9F}"/>
               </a:ext>
             </a:extLst>
           </p:cNvPr>
@@ -9255,7 +9263,7 @@
           <p:cNvPr id="4" name="">
             <a:extLst xmlns:a="http://schemas.openxmlformats.org/drawingml/2006/main">
               <a:ext uri="{FF2B5EF4-FFF2-40B4-BE49-F238E27FC236}">
-                <a16:creationId xmlns:a16="http://schemas.microsoft.com/office/drawing/2014/main" id="{86166568-9DEE-46C6-9913-E2FB850ED617}"/>
+                <a16:creationId xmlns:a16="http://schemas.microsoft.com/office/drawing/2014/main" id="{6B76A124-8165-406E-834E-6A0854A9772D}"/>
               </a:ext>
             </a:extLst>
           </p:cNvPr>
@@ -9312,7 +9320,7 @@
           <p:cNvPr id="5" name="">
             <a:extLst xmlns:a="http://schemas.openxmlformats.org/drawingml/2006/main">
               <a:ext uri="{FF2B5EF4-FFF2-40B4-BE49-F238E27FC236}">
-                <a16:creationId xmlns:a16="http://schemas.microsoft.com/office/drawing/2014/main" id="{062AD391-8BA9-4562-AD6B-8DF951345ACF}"/>
+                <a16:creationId xmlns:a16="http://schemas.microsoft.com/office/drawing/2014/main" id="{2369ED1B-5328-4C3E-A7C5-062B4BE35B85}"/>
               </a:ext>
             </a:extLst>
           </p:cNvPr>
@@ -9369,7 +9377,7 @@
           <p:cNvPr id="6" name="">
             <a:extLst xmlns:a="http://schemas.openxmlformats.org/drawingml/2006/main">
               <a:ext uri="{FF2B5EF4-FFF2-40B4-BE49-F238E27FC236}">
-                <a16:creationId xmlns:a16="http://schemas.microsoft.com/office/drawing/2014/main" id="{E96D905C-F22E-4149-B811-CA6C2A1D267A}"/>
+                <a16:creationId xmlns:a16="http://schemas.microsoft.com/office/drawing/2014/main" id="{7FA5F5CE-447A-4662-AC6F-FB41FECC5A39}"/>
               </a:ext>
             </a:extLst>
           </p:cNvPr>
@@ -9426,7 +9434,7 @@
           <p:cNvPr id="7" name="">
             <a:extLst xmlns:a="http://schemas.openxmlformats.org/drawingml/2006/main">
               <a:ext uri="{FF2B5EF4-FFF2-40B4-BE49-F238E27FC236}">
-                <a16:creationId xmlns:a16="http://schemas.microsoft.com/office/drawing/2014/main" id="{76501642-BD2B-4F07-9C14-B5EA4342E828}"/>
+                <a16:creationId xmlns:a16="http://schemas.microsoft.com/office/drawing/2014/main" id="{D8FC9CCB-64EB-4C22-B40A-9937AB23DEDB}"/>
               </a:ext>
             </a:extLst>
           </p:cNvPr>
@@ -9458,7 +9466,7 @@
           <p:cNvPr id="8" name="">
             <a:extLst xmlns:a="http://schemas.openxmlformats.org/drawingml/2006/main">
               <a:ext uri="{FF2B5EF4-FFF2-40B4-BE49-F238E27FC236}">
-                <a16:creationId xmlns:a16="http://schemas.microsoft.com/office/drawing/2014/main" id="{C46A2E53-179F-4238-8064-23A1C79BD252}"/>
+                <a16:creationId xmlns:a16="http://schemas.microsoft.com/office/drawing/2014/main" id="{8EEC9E2A-7DD7-43CC-B3B4-A0625CE1005B}"/>
               </a:ext>
             </a:extLst>
           </p:cNvPr>
@@ -9515,7 +9523,7 @@
           <p:cNvPr id="9" name="">
             <a:extLst xmlns:a="http://schemas.openxmlformats.org/drawingml/2006/main">
               <a:ext uri="{FF2B5EF4-FFF2-40B4-BE49-F238E27FC236}">
-                <a16:creationId xmlns:a16="http://schemas.microsoft.com/office/drawing/2014/main" id="{B727D78B-BFAC-4717-8960-915B122E3DF9}"/>
+                <a16:creationId xmlns:a16="http://schemas.microsoft.com/office/drawing/2014/main" id="{5032889E-D8FE-4BB2-A582-10D0C4B0FA91}"/>
               </a:ext>
             </a:extLst>
           </p:cNvPr>
@@ -9572,7 +9580,7 @@
           <p:cNvPr id="10" name="">
             <a:extLst xmlns:a="http://schemas.openxmlformats.org/drawingml/2006/main">
               <a:ext uri="{FF2B5EF4-FFF2-40B4-BE49-F238E27FC236}">
-                <a16:creationId xmlns:a16="http://schemas.microsoft.com/office/drawing/2014/main" id="{3D4FCA3D-FE27-4BBC-939E-2847D996A768}"/>
+                <a16:creationId xmlns:a16="http://schemas.microsoft.com/office/drawing/2014/main" id="{A80A3D87-5942-479D-AF7B-13006EC0FFBF}"/>
               </a:ext>
             </a:extLst>
           </p:cNvPr>
@@ -9629,7 +9637,7 @@
           <p:cNvPr id="11" name="">
             <a:extLst xmlns:a="http://schemas.openxmlformats.org/drawingml/2006/main">
               <a:ext uri="{FF2B5EF4-FFF2-40B4-BE49-F238E27FC236}">
-                <a16:creationId xmlns:a16="http://schemas.microsoft.com/office/drawing/2014/main" id="{8508A93F-0098-4450-A07C-BA1A0464E664}"/>
+                <a16:creationId xmlns:a16="http://schemas.microsoft.com/office/drawing/2014/main" id="{EB1E223D-D81B-445D-A896-5956647BBC92}"/>
               </a:ext>
             </a:extLst>
           </p:cNvPr>
@@ -9686,7 +9694,7 @@
           <p:cNvPr id="12" name="">
             <a:extLst xmlns:a="http://schemas.openxmlformats.org/drawingml/2006/main">
               <a:ext uri="{FF2B5EF4-FFF2-40B4-BE49-F238E27FC236}">
-                <a16:creationId xmlns:a16="http://schemas.microsoft.com/office/drawing/2014/main" id="{CE48675F-1507-4274-8367-E6E2E456EC75}"/>
+                <a16:creationId xmlns:a16="http://schemas.microsoft.com/office/drawing/2014/main" id="{12A418AE-80F7-460F-AB43-9AA8D63017F1}"/>
               </a:ext>
             </a:extLst>
           </p:cNvPr>
@@ -9718,7 +9726,7 @@
           <p:cNvPr id="13" name="">
             <a:extLst xmlns:a="http://schemas.openxmlformats.org/drawingml/2006/main">
               <a:ext uri="{FF2B5EF4-FFF2-40B4-BE49-F238E27FC236}">
-                <a16:creationId xmlns:a16="http://schemas.microsoft.com/office/drawing/2014/main" id="{AFD1A5DC-DE91-4763-8DE9-3B055D3D6CC3}"/>
+                <a16:creationId xmlns:a16="http://schemas.microsoft.com/office/drawing/2014/main" id="{2E8A685C-E8A4-4C76-AAAF-2C87752980B2}"/>
               </a:ext>
             </a:extLst>
           </p:cNvPr>
@@ -9775,7 +9783,7 @@
           <p:cNvPr id="14" name="">
             <a:extLst xmlns:a="http://schemas.openxmlformats.org/drawingml/2006/main">
               <a:ext uri="{FF2B5EF4-FFF2-40B4-BE49-F238E27FC236}">
-                <a16:creationId xmlns:a16="http://schemas.microsoft.com/office/drawing/2014/main" id="{EA9087E7-5C97-4E84-A99F-B6FA31523AE4}"/>
+                <a16:creationId xmlns:a16="http://schemas.microsoft.com/office/drawing/2014/main" id="{1710451E-63DA-4E18-B665-0F437C486436}"/>
               </a:ext>
             </a:extLst>
           </p:cNvPr>
@@ -9830,7 +9838,7 @@
     </p:spTree>
     <p:extLst>
       <p:ext uri="{BB962C8B-B14F-4D97-AF65-F5344CB8AC3E}">
-        <p14:creationId xmlns:p14="http://schemas.microsoft.com/office/powerpoint/2010/main" val="330435972"/>
+        <p14:creationId xmlns:p14="http://schemas.microsoft.com/office/powerpoint/2010/main" val="618012429"/>
       </p:ext>
     </p:extLst>
   </p:cSld>
@@ -10031,7 +10039,7 @@
           <p:cNvPr id="16" name="">
             <a:extLst xmlns:a="http://schemas.openxmlformats.org/drawingml/2006/main">
               <a:ext uri="{FF2B5EF4-FFF2-40B4-BE49-F238E27FC236}">
-                <a16:creationId xmlns:a16="http://schemas.microsoft.com/office/drawing/2014/main" id="{C4B3EF4D-B66F-4E09-93F9-3D76BD0CFBF6}"/>
+                <a16:creationId xmlns:a16="http://schemas.microsoft.com/office/drawing/2014/main" id="{7ABD3724-3005-4E7C-9EE0-EDF011260740}"/>
               </a:ext>
             </a:extLst>
           </p:cNvPr>
@@ -10063,7 +10071,7 @@
           <p:cNvPr id="2" name="">
             <a:extLst xmlns:a="http://schemas.openxmlformats.org/drawingml/2006/main">
               <a:ext uri="{FF2B5EF4-FFF2-40B4-BE49-F238E27FC236}">
-                <a16:creationId xmlns:a16="http://schemas.microsoft.com/office/drawing/2014/main" id="{15D254C9-17A2-486C-B874-9BDF67CC1977}"/>
+                <a16:creationId xmlns:a16="http://schemas.microsoft.com/office/drawing/2014/main" id="{800BB3A7-DD75-4DB9-A3AE-7CB3DE218588}"/>
               </a:ext>
             </a:extLst>
           </p:cNvPr>
@@ -10120,7 +10128,7 @@
           <p:cNvPr id="3" name="">
             <a:extLst xmlns:a="http://schemas.openxmlformats.org/drawingml/2006/main">
               <a:ext uri="{FF2B5EF4-FFF2-40B4-BE49-F238E27FC236}">
-                <a16:creationId xmlns:a16="http://schemas.microsoft.com/office/drawing/2014/main" id="{BE332029-06F9-482E-ABF4-C4D0AB091B2E}"/>
+                <a16:creationId xmlns:a16="http://schemas.microsoft.com/office/drawing/2014/main" id="{8C9A9752-F89D-4238-A11C-2177C86112C2}"/>
               </a:ext>
             </a:extLst>
           </p:cNvPr>
@@ -10152,7 +10160,7 @@
           <p:cNvPr id="4" name="">
             <a:extLst xmlns:a="http://schemas.openxmlformats.org/drawingml/2006/main">
               <a:ext uri="{FF2B5EF4-FFF2-40B4-BE49-F238E27FC236}">
-                <a16:creationId xmlns:a16="http://schemas.microsoft.com/office/drawing/2014/main" id="{F0984A69-6146-48B2-8CB8-DD91661A0ED8}"/>
+                <a16:creationId xmlns:a16="http://schemas.microsoft.com/office/drawing/2014/main" id="{38D097F6-54F4-4D87-920F-76EFA7B17837}"/>
               </a:ext>
             </a:extLst>
           </p:cNvPr>
@@ -10209,7 +10217,7 @@
           <p:cNvPr id="5" name="">
             <a:extLst xmlns:a="http://schemas.openxmlformats.org/drawingml/2006/main">
               <a:ext uri="{FF2B5EF4-FFF2-40B4-BE49-F238E27FC236}">
-                <a16:creationId xmlns:a16="http://schemas.microsoft.com/office/drawing/2014/main" id="{42221DE5-6B42-4393-ACE6-B78614046186}"/>
+                <a16:creationId xmlns:a16="http://schemas.microsoft.com/office/drawing/2014/main" id="{23D357D7-B692-483E-9963-962A37F855B1}"/>
               </a:ext>
             </a:extLst>
           </p:cNvPr>
@@ -10266,7 +10274,7 @@
           <p:cNvPr id="6" name="">
             <a:extLst xmlns:a="http://schemas.openxmlformats.org/drawingml/2006/main">
               <a:ext uri="{FF2B5EF4-FFF2-40B4-BE49-F238E27FC236}">
-                <a16:creationId xmlns:a16="http://schemas.microsoft.com/office/drawing/2014/main" id="{7B66E097-909D-4FFA-8CB2-2A96DDD738CC}"/>
+                <a16:creationId xmlns:a16="http://schemas.microsoft.com/office/drawing/2014/main" id="{D962E078-43EA-47F7-895A-C1873F299F19}"/>
               </a:ext>
             </a:extLst>
           </p:cNvPr>
@@ -10323,7 +10331,7 @@
           <p:cNvPr id="7" name="">
             <a:extLst xmlns:a="http://schemas.openxmlformats.org/drawingml/2006/main">
               <a:ext uri="{FF2B5EF4-FFF2-40B4-BE49-F238E27FC236}">
-                <a16:creationId xmlns:a16="http://schemas.microsoft.com/office/drawing/2014/main" id="{068EE4D3-3C4B-4A27-B1D7-611F3D4DDB3B}"/>
+                <a16:creationId xmlns:a16="http://schemas.microsoft.com/office/drawing/2014/main" id="{47927A60-342F-40E8-A5BA-40FECE825C5A}"/>
               </a:ext>
             </a:extLst>
           </p:cNvPr>
@@ -10355,7 +10363,7 @@
           <p:cNvPr id="8" name="">
             <a:extLst xmlns:a="http://schemas.openxmlformats.org/drawingml/2006/main">
               <a:ext uri="{FF2B5EF4-FFF2-40B4-BE49-F238E27FC236}">
-                <a16:creationId xmlns:a16="http://schemas.microsoft.com/office/drawing/2014/main" id="{E3EC5EBE-CB3C-4D4A-87A8-F044E01F4A4C}"/>
+                <a16:creationId xmlns:a16="http://schemas.microsoft.com/office/drawing/2014/main" id="{91B5ED87-9895-4D34-8442-D4428D8778A0}"/>
               </a:ext>
             </a:extLst>
           </p:cNvPr>
@@ -10412,7 +10420,7 @@
           <p:cNvPr id="9" name="">
             <a:extLst xmlns:a="http://schemas.openxmlformats.org/drawingml/2006/main">
               <a:ext uri="{FF2B5EF4-FFF2-40B4-BE49-F238E27FC236}">
-                <a16:creationId xmlns:a16="http://schemas.microsoft.com/office/drawing/2014/main" id="{DED586F4-321B-43E7-9857-A1DE83A4BB50}"/>
+                <a16:creationId xmlns:a16="http://schemas.microsoft.com/office/drawing/2014/main" id="{50EA7082-6F50-4369-9BBD-BE2B0B2FD3E9}"/>
               </a:ext>
             </a:extLst>
           </p:cNvPr>
@@ -10469,7 +10477,7 @@
           <p:cNvPr id="10" name="">
             <a:extLst xmlns:a="http://schemas.openxmlformats.org/drawingml/2006/main">
               <a:ext uri="{FF2B5EF4-FFF2-40B4-BE49-F238E27FC236}">
-                <a16:creationId xmlns:a16="http://schemas.microsoft.com/office/drawing/2014/main" id="{49129A81-B950-4DF1-A706-7B7ADE4E93B8}"/>
+                <a16:creationId xmlns:a16="http://schemas.microsoft.com/office/drawing/2014/main" id="{D95F36B0-642B-4751-8F86-46D27CD31C93}"/>
               </a:ext>
             </a:extLst>
           </p:cNvPr>
@@ -10526,7 +10534,7 @@
           <p:cNvPr id="11" name="">
             <a:extLst xmlns:a="http://schemas.openxmlformats.org/drawingml/2006/main">
               <a:ext uri="{FF2B5EF4-FFF2-40B4-BE49-F238E27FC236}">
-                <a16:creationId xmlns:a16="http://schemas.microsoft.com/office/drawing/2014/main" id="{2395C4C8-77CC-4DC6-B497-D5857EACE61C}"/>
+                <a16:creationId xmlns:a16="http://schemas.microsoft.com/office/drawing/2014/main" id="{AA065A5F-BE2F-4F35-BD2C-E2A5686E04DF}"/>
               </a:ext>
             </a:extLst>
           </p:cNvPr>
@@ -10583,7 +10591,7 @@
           <p:cNvPr id="12" name="">
             <a:extLst xmlns:a="http://schemas.openxmlformats.org/drawingml/2006/main">
               <a:ext uri="{FF2B5EF4-FFF2-40B4-BE49-F238E27FC236}">
-                <a16:creationId xmlns:a16="http://schemas.microsoft.com/office/drawing/2014/main" id="{A69C9635-C898-4685-B05C-B587EC3F1F06}"/>
+                <a16:creationId xmlns:a16="http://schemas.microsoft.com/office/drawing/2014/main" id="{AE2B7174-7545-4333-81B5-2C67381B4186}"/>
               </a:ext>
             </a:extLst>
           </p:cNvPr>
@@ -10640,7 +10648,7 @@
           <p:cNvPr id="13" name="">
             <a:extLst xmlns:a="http://schemas.openxmlformats.org/drawingml/2006/main">
               <a:ext uri="{FF2B5EF4-FFF2-40B4-BE49-F238E27FC236}">
-                <a16:creationId xmlns:a16="http://schemas.microsoft.com/office/drawing/2014/main" id="{C86EA129-57EB-48CF-8173-4721141AD354}"/>
+                <a16:creationId xmlns:a16="http://schemas.microsoft.com/office/drawing/2014/main" id="{6EAA9EA9-BC69-4330-9D82-9CDF00C2B92B}"/>
               </a:ext>
             </a:extLst>
           </p:cNvPr>
@@ -10697,7 +10705,7 @@
           <p:cNvPr id="14" name="">
             <a:extLst xmlns:a="http://schemas.openxmlformats.org/drawingml/2006/main">
               <a:ext uri="{FF2B5EF4-FFF2-40B4-BE49-F238E27FC236}">
-                <a16:creationId xmlns:a16="http://schemas.microsoft.com/office/drawing/2014/main" id="{889942D9-47A4-4C33-88F2-1FFAC49D1B76}"/>
+                <a16:creationId xmlns:a16="http://schemas.microsoft.com/office/drawing/2014/main" id="{1F370428-0777-4C60-B86B-13B391BE7C0C}"/>
               </a:ext>
             </a:extLst>
           </p:cNvPr>
@@ -10754,7 +10762,7 @@
           <p:cNvPr id="15" name="">
             <a:extLst xmlns:a="http://schemas.openxmlformats.org/drawingml/2006/main">
               <a:ext uri="{FF2B5EF4-FFF2-40B4-BE49-F238E27FC236}">
-                <a16:creationId xmlns:a16="http://schemas.microsoft.com/office/drawing/2014/main" id="{EA15FE5E-A236-4283-9631-63D1E4909431}"/>
+                <a16:creationId xmlns:a16="http://schemas.microsoft.com/office/drawing/2014/main" id="{ECCC06CD-2862-488B-9F1A-00CC2A830FB7}"/>
               </a:ext>
             </a:extLst>
           </p:cNvPr>
@@ -10809,7 +10817,7 @@
     </p:spTree>
     <p:extLst>
       <p:ext uri="{BB962C8B-B14F-4D97-AF65-F5344CB8AC3E}">
-        <p14:creationId xmlns:p14="http://schemas.microsoft.com/office/powerpoint/2010/main" val="2048810391"/>
+        <p14:creationId xmlns:p14="http://schemas.microsoft.com/office/powerpoint/2010/main" val="2030619790"/>
       </p:ext>
     </p:extLst>
   </p:cSld>
@@ -10964,7 +10972,7 @@
           <p:cNvPr id="16" name="">
             <a:extLst xmlns:a="http://schemas.openxmlformats.org/drawingml/2006/main">
               <a:ext uri="{FF2B5EF4-FFF2-40B4-BE49-F238E27FC236}">
-                <a16:creationId xmlns:a16="http://schemas.microsoft.com/office/drawing/2014/main" id="{EB7212CD-D7EF-471D-851A-247DDB7E538F}"/>
+                <a16:creationId xmlns:a16="http://schemas.microsoft.com/office/drawing/2014/main" id="{792B504D-06D9-4BDB-922E-66F3B64C51A7}"/>
               </a:ext>
             </a:extLst>
           </p:cNvPr>
@@ -10996,7 +11004,7 @@
           <p:cNvPr id="2" name="">
             <a:extLst xmlns:a="http://schemas.openxmlformats.org/drawingml/2006/main">
               <a:ext uri="{FF2B5EF4-FFF2-40B4-BE49-F238E27FC236}">
-                <a16:creationId xmlns:a16="http://schemas.microsoft.com/office/drawing/2014/main" id="{DB345F00-226D-4C9F-8990-27AA39AC6A90}"/>
+                <a16:creationId xmlns:a16="http://schemas.microsoft.com/office/drawing/2014/main" id="{CEA329FB-8AE1-46EB-9643-30AF4E4A8FAD}"/>
               </a:ext>
             </a:extLst>
           </p:cNvPr>
@@ -11053,7 +11061,7 @@
           <p:cNvPr id="3" name="">
             <a:extLst xmlns:a="http://schemas.openxmlformats.org/drawingml/2006/main">
               <a:ext uri="{FF2B5EF4-FFF2-40B4-BE49-F238E27FC236}">
-                <a16:creationId xmlns:a16="http://schemas.microsoft.com/office/drawing/2014/main" id="{CBC708E9-095D-4539-9D89-655B87D250D2}"/>
+                <a16:creationId xmlns:a16="http://schemas.microsoft.com/office/drawing/2014/main" id="{96DA3BD1-AD01-4CF7-BC0E-DAD1F61C8939}"/>
               </a:ext>
             </a:extLst>
           </p:cNvPr>
@@ -11085,7 +11093,7 @@
           <p:cNvPr id="4" name="">
             <a:extLst xmlns:a="http://schemas.openxmlformats.org/drawingml/2006/main">
               <a:ext uri="{FF2B5EF4-FFF2-40B4-BE49-F238E27FC236}">
-                <a16:creationId xmlns:a16="http://schemas.microsoft.com/office/drawing/2014/main" id="{8E50D58C-A715-4C05-94B2-5922298DDA90}"/>
+                <a16:creationId xmlns:a16="http://schemas.microsoft.com/office/drawing/2014/main" id="{315D50C2-8BF9-4D95-970D-6825E3E29B3C}"/>
               </a:ext>
             </a:extLst>
           </p:cNvPr>
@@ -11142,7 +11150,7 @@
           <p:cNvPr id="5" name="">
             <a:extLst xmlns:a="http://schemas.openxmlformats.org/drawingml/2006/main">
               <a:ext uri="{FF2B5EF4-FFF2-40B4-BE49-F238E27FC236}">
-                <a16:creationId xmlns:a16="http://schemas.microsoft.com/office/drawing/2014/main" id="{D5B353FE-0FD4-4CF1-8CE5-102C39AE5CF9}"/>
+                <a16:creationId xmlns:a16="http://schemas.microsoft.com/office/drawing/2014/main" id="{AF38FBC7-22BB-4A01-A0F4-69E6CB4849F3}"/>
               </a:ext>
             </a:extLst>
           </p:cNvPr>
@@ -11199,7 +11207,7 @@
           <p:cNvPr id="6" name="">
             <a:extLst xmlns:a="http://schemas.openxmlformats.org/drawingml/2006/main">
               <a:ext uri="{FF2B5EF4-FFF2-40B4-BE49-F238E27FC236}">
-                <a16:creationId xmlns:a16="http://schemas.microsoft.com/office/drawing/2014/main" id="{D02A8812-8631-4E4E-99A8-C3D56BD55267}"/>
+                <a16:creationId xmlns:a16="http://schemas.microsoft.com/office/drawing/2014/main" id="{4C59A608-6597-46C0-AD95-BB00DE401A6F}"/>
               </a:ext>
             </a:extLst>
           </p:cNvPr>
@@ -11256,7 +11264,7 @@
           <p:cNvPr id="7" name="">
             <a:extLst xmlns:a="http://schemas.openxmlformats.org/drawingml/2006/main">
               <a:ext uri="{FF2B5EF4-FFF2-40B4-BE49-F238E27FC236}">
-                <a16:creationId xmlns:a16="http://schemas.microsoft.com/office/drawing/2014/main" id="{42023644-9807-4D9C-8FFB-5417E5CF4D34}"/>
+                <a16:creationId xmlns:a16="http://schemas.microsoft.com/office/drawing/2014/main" id="{1BCEC144-06D0-461B-9B5B-2DB106E9E167}"/>
               </a:ext>
             </a:extLst>
           </p:cNvPr>
@@ -11288,7 +11296,7 @@
           <p:cNvPr id="8" name="">
             <a:extLst xmlns:a="http://schemas.openxmlformats.org/drawingml/2006/main">
               <a:ext uri="{FF2B5EF4-FFF2-40B4-BE49-F238E27FC236}">
-                <a16:creationId xmlns:a16="http://schemas.microsoft.com/office/drawing/2014/main" id="{8097AC2B-6AE4-47D7-AD48-77E780640A7C}"/>
+                <a16:creationId xmlns:a16="http://schemas.microsoft.com/office/drawing/2014/main" id="{7D4F7B13-1DE2-4221-966D-E44837B7E50D}"/>
               </a:ext>
             </a:extLst>
           </p:cNvPr>
@@ -11345,7 +11353,7 @@
           <p:cNvPr id="9" name="">
             <a:extLst xmlns:a="http://schemas.openxmlformats.org/drawingml/2006/main">
               <a:ext uri="{FF2B5EF4-FFF2-40B4-BE49-F238E27FC236}">
-                <a16:creationId xmlns:a16="http://schemas.microsoft.com/office/drawing/2014/main" id="{B7CB6AEF-AAD4-4174-BC37-E3A6EEDF1DEE}"/>
+                <a16:creationId xmlns:a16="http://schemas.microsoft.com/office/drawing/2014/main" id="{041182A4-3314-41D0-A1D4-9465F5C201CC}"/>
               </a:ext>
             </a:extLst>
           </p:cNvPr>
@@ -11406,7 +11414,7 @@
           <p:nvPr/>
         </p:nvPicPr>
         <p:blipFill>
-          <a:blip xmlns:r="http://schemas.openxmlformats.org/officeDocument/2006/relationships" xmlns:a="http://schemas.openxmlformats.org/drawingml/2006/main" r:embed="R702d760520f64278"/>
+          <a:blip xmlns:r="http://schemas.openxmlformats.org/officeDocument/2006/relationships" xmlns:a="http://schemas.openxmlformats.org/drawingml/2006/main" r:embed="Raac054f23b7a4779"/>
           <a:stretch xmlns:a="http://schemas.openxmlformats.org/drawingml/2006/main"/>
         </p:blipFill>
         <p:spPr>
@@ -11424,7 +11432,7 @@
           <p:cNvPr id="11" name="">
             <a:extLst xmlns:a="http://schemas.openxmlformats.org/drawingml/2006/main">
               <a:ext uri="{FF2B5EF4-FFF2-40B4-BE49-F238E27FC236}">
-                <a16:creationId xmlns:a16="http://schemas.microsoft.com/office/drawing/2014/main" id="{F8B52073-CD99-4092-800D-4ECFB9484B0F}"/>
+                <a16:creationId xmlns:a16="http://schemas.microsoft.com/office/drawing/2014/main" id="{2056C8EB-AA0F-4068-8E3C-F25D398CDF4D}"/>
               </a:ext>
             </a:extLst>
           </p:cNvPr>
@@ -11481,7 +11489,7 @@
           <p:cNvPr id="12" name="">
             <a:extLst xmlns:a="http://schemas.openxmlformats.org/drawingml/2006/main">
               <a:ext uri="{FF2B5EF4-FFF2-40B4-BE49-F238E27FC236}">
-                <a16:creationId xmlns:a16="http://schemas.microsoft.com/office/drawing/2014/main" id="{31C7C6BC-6F5E-4547-BA37-8A6ECE5270CA}"/>
+                <a16:creationId xmlns:a16="http://schemas.microsoft.com/office/drawing/2014/main" id="{0FA8C4AC-4B7B-4452-83C6-65118EBF2E26}"/>
               </a:ext>
             </a:extLst>
           </p:cNvPr>
@@ -11538,7 +11546,7 @@
           <p:cNvPr id="13" name="">
             <a:extLst xmlns:a="http://schemas.openxmlformats.org/drawingml/2006/main">
               <a:ext uri="{FF2B5EF4-FFF2-40B4-BE49-F238E27FC236}">
-                <a16:creationId xmlns:a16="http://schemas.microsoft.com/office/drawing/2014/main" id="{4B227344-B328-438F-8E47-F9325030F08B}"/>
+                <a16:creationId xmlns:a16="http://schemas.microsoft.com/office/drawing/2014/main" id="{D126CFF6-D93D-4FC2-8D74-AF3CC54228B6}"/>
               </a:ext>
             </a:extLst>
           </p:cNvPr>
@@ -11570,7 +11578,7 @@
           <p:cNvPr id="14" name="">
             <a:extLst xmlns:a="http://schemas.openxmlformats.org/drawingml/2006/main">
               <a:ext uri="{FF2B5EF4-FFF2-40B4-BE49-F238E27FC236}">
-                <a16:creationId xmlns:a16="http://schemas.microsoft.com/office/drawing/2014/main" id="{8E0D7847-89AB-4953-A065-1E932A631A67}"/>
+                <a16:creationId xmlns:a16="http://schemas.microsoft.com/office/drawing/2014/main" id="{2658C5F9-59AF-4621-96B6-B0D4A6AE2196}"/>
               </a:ext>
             </a:extLst>
           </p:cNvPr>
@@ -11627,7 +11635,7 @@
           <p:cNvPr id="15" name="">
             <a:extLst xmlns:a="http://schemas.openxmlformats.org/drawingml/2006/main">
               <a:ext uri="{FF2B5EF4-FFF2-40B4-BE49-F238E27FC236}">
-                <a16:creationId xmlns:a16="http://schemas.microsoft.com/office/drawing/2014/main" id="{8313952D-38CF-4C16-83CB-8C19DE325F00}"/>
+                <a16:creationId xmlns:a16="http://schemas.microsoft.com/office/drawing/2014/main" id="{B3E3C6CF-A50E-47E9-B966-B4666B5B9D14}"/>
               </a:ext>
             </a:extLst>
           </p:cNvPr>
@@ -11682,7 +11690,7 @@
     </p:spTree>
     <p:extLst>
       <p:ext uri="{BB962C8B-B14F-4D97-AF65-F5344CB8AC3E}">
-        <p14:creationId xmlns:p14="http://schemas.microsoft.com/office/powerpoint/2010/main" val="469903851"/>
+        <p14:creationId xmlns:p14="http://schemas.microsoft.com/office/powerpoint/2010/main" val="64362940"/>
       </p:ext>
     </p:extLst>
   </p:cSld>
@@ -11837,7 +11845,7 @@
           <p:cNvPr id="23" name="">
             <a:extLst xmlns:a="http://schemas.openxmlformats.org/drawingml/2006/main">
               <a:ext uri="{FF2B5EF4-FFF2-40B4-BE49-F238E27FC236}">
-                <a16:creationId xmlns:a16="http://schemas.microsoft.com/office/drawing/2014/main" id="{D394AB29-2166-430F-973F-7643623D5341}"/>
+                <a16:creationId xmlns:a16="http://schemas.microsoft.com/office/drawing/2014/main" id="{693B98C8-38F2-4838-98C2-069C6D9D029C}"/>
               </a:ext>
             </a:extLst>
           </p:cNvPr>
@@ -11869,7 +11877,7 @@
           <p:cNvPr id="2" name="">
             <a:extLst xmlns:a="http://schemas.openxmlformats.org/drawingml/2006/main">
               <a:ext uri="{FF2B5EF4-FFF2-40B4-BE49-F238E27FC236}">
-                <a16:creationId xmlns:a16="http://schemas.microsoft.com/office/drawing/2014/main" id="{7D490FBD-C044-437A-B42B-8860BD1AED0A}"/>
+                <a16:creationId xmlns:a16="http://schemas.microsoft.com/office/drawing/2014/main" id="{E00AA6B3-040E-410B-9F1A-D9BFB6CA1714}"/>
               </a:ext>
             </a:extLst>
           </p:cNvPr>
@@ -11926,7 +11934,7 @@
           <p:cNvPr id="3" name="">
             <a:extLst xmlns:a="http://schemas.openxmlformats.org/drawingml/2006/main">
               <a:ext uri="{FF2B5EF4-FFF2-40B4-BE49-F238E27FC236}">
-                <a16:creationId xmlns:a16="http://schemas.microsoft.com/office/drawing/2014/main" id="{AEEEDC4B-951E-421B-B6F2-C7C69D004347}"/>
+                <a16:creationId xmlns:a16="http://schemas.microsoft.com/office/drawing/2014/main" id="{DB9F3C84-D57F-4336-A0DC-D5156EBD753F}"/>
               </a:ext>
             </a:extLst>
           </p:cNvPr>
@@ -11958,7 +11966,7 @@
           <p:cNvPr id="4" name="">
             <a:extLst xmlns:a="http://schemas.openxmlformats.org/drawingml/2006/main">
               <a:ext uri="{FF2B5EF4-FFF2-40B4-BE49-F238E27FC236}">
-                <a16:creationId xmlns:a16="http://schemas.microsoft.com/office/drawing/2014/main" id="{EC000729-086C-4F18-AD0E-D5305BBA1084}"/>
+                <a16:creationId xmlns:a16="http://schemas.microsoft.com/office/drawing/2014/main" id="{149B8C18-4B18-4335-AD75-31060C8F72E7}"/>
               </a:ext>
             </a:extLst>
           </p:cNvPr>
@@ -12015,7 +12023,7 @@
           <p:cNvPr id="5" name="">
             <a:extLst xmlns:a="http://schemas.openxmlformats.org/drawingml/2006/main">
               <a:ext uri="{FF2B5EF4-FFF2-40B4-BE49-F238E27FC236}">
-                <a16:creationId xmlns:a16="http://schemas.microsoft.com/office/drawing/2014/main" id="{DD0A8F42-F16D-4C11-9E4E-7AF40195D59E}"/>
+                <a16:creationId xmlns:a16="http://schemas.microsoft.com/office/drawing/2014/main" id="{99E601A0-6695-492B-99A9-A03875A7A01F}"/>
               </a:ext>
             </a:extLst>
           </p:cNvPr>
@@ -12072,7 +12080,7 @@
           <p:cNvPr id="6" name="">
             <a:extLst xmlns:a="http://schemas.openxmlformats.org/drawingml/2006/main">
               <a:ext uri="{FF2B5EF4-FFF2-40B4-BE49-F238E27FC236}">
-                <a16:creationId xmlns:a16="http://schemas.microsoft.com/office/drawing/2014/main" id="{CAEA005D-0D35-4E98-93BC-B8D437C4FAA7}"/>
+                <a16:creationId xmlns:a16="http://schemas.microsoft.com/office/drawing/2014/main" id="{F73D2EE3-6F94-4731-8F63-41D03428278A}"/>
               </a:ext>
             </a:extLst>
           </p:cNvPr>
@@ -12129,7 +12137,7 @@
           <p:cNvPr id="7" name="">
             <a:extLst xmlns:a="http://schemas.openxmlformats.org/drawingml/2006/main">
               <a:ext uri="{FF2B5EF4-FFF2-40B4-BE49-F238E27FC236}">
-                <a16:creationId xmlns:a16="http://schemas.microsoft.com/office/drawing/2014/main" id="{1FDC49C7-29C4-4CCC-9080-590A615C1907}"/>
+                <a16:creationId xmlns:a16="http://schemas.microsoft.com/office/drawing/2014/main" id="{CDA05E05-C549-433B-837B-7A161BE4BEAB}"/>
               </a:ext>
             </a:extLst>
           </p:cNvPr>
@@ -12161,7 +12169,7 @@
           <p:cNvPr id="8" name="">
             <a:extLst xmlns:a="http://schemas.openxmlformats.org/drawingml/2006/main">
               <a:ext uri="{FF2B5EF4-FFF2-40B4-BE49-F238E27FC236}">
-                <a16:creationId xmlns:a16="http://schemas.microsoft.com/office/drawing/2014/main" id="{920FA568-B81E-4DAF-B924-7600865AC5C5}"/>
+                <a16:creationId xmlns:a16="http://schemas.microsoft.com/office/drawing/2014/main" id="{F3C9170E-4FFC-4C0F-BD7C-255174D55F66}"/>
               </a:ext>
             </a:extLst>
           </p:cNvPr>
@@ -12218,7 +12226,7 @@
           <p:cNvPr id="9" name="">
             <a:extLst xmlns:a="http://schemas.openxmlformats.org/drawingml/2006/main">
               <a:ext uri="{FF2B5EF4-FFF2-40B4-BE49-F238E27FC236}">
-                <a16:creationId xmlns:a16="http://schemas.microsoft.com/office/drawing/2014/main" id="{DAF2BEA4-8137-4B95-8F31-45368B0F42D3}"/>
+                <a16:creationId xmlns:a16="http://schemas.microsoft.com/office/drawing/2014/main" id="{CF70B490-1879-4404-9A20-F065462396E9}"/>
               </a:ext>
             </a:extLst>
           </p:cNvPr>
@@ -12275,7 +12283,7 @@
           <p:cNvPr id="10" name="">
             <a:extLst xmlns:a="http://schemas.openxmlformats.org/drawingml/2006/main">
               <a:ext uri="{FF2B5EF4-FFF2-40B4-BE49-F238E27FC236}">
-                <a16:creationId xmlns:a16="http://schemas.microsoft.com/office/drawing/2014/main" id="{1044866C-681F-49F0-A6E2-50E4B729ABE7}"/>
+                <a16:creationId xmlns:a16="http://schemas.microsoft.com/office/drawing/2014/main" id="{61910072-6073-4BF2-9F2E-0C53CA14EC16}"/>
               </a:ext>
             </a:extLst>
           </p:cNvPr>
@@ -12309,7 +12317,7 @@
           <p:cNvPr id="11" name="">
             <a:extLst xmlns:a="http://schemas.openxmlformats.org/drawingml/2006/main">
               <a:ext uri="{FF2B5EF4-FFF2-40B4-BE49-F238E27FC236}">
-                <a16:creationId xmlns:a16="http://schemas.microsoft.com/office/drawing/2014/main" id="{9A32DBCE-9EAA-4F52-9BBB-AFE9ABE471A0}"/>
+                <a16:creationId xmlns:a16="http://schemas.microsoft.com/office/drawing/2014/main" id="{7C8154F3-BA79-4514-B9A1-05AEFE7A1AA8}"/>
               </a:ext>
             </a:extLst>
           </p:cNvPr>
@@ -12341,7 +12349,7 @@
           <p:cNvPr id="12" name="">
             <a:extLst xmlns:a="http://schemas.openxmlformats.org/drawingml/2006/main">
               <a:ext uri="{FF2B5EF4-FFF2-40B4-BE49-F238E27FC236}">
-                <a16:creationId xmlns:a16="http://schemas.microsoft.com/office/drawing/2014/main" id="{6E824DBA-3ADF-4519-8B2C-A852A58A9DCB}"/>
+                <a16:creationId xmlns:a16="http://schemas.microsoft.com/office/drawing/2014/main" id="{56D3FDA3-EE8A-4608-A57F-2C7C22170C0E}"/>
               </a:ext>
             </a:extLst>
           </p:cNvPr>
@@ -12398,7 +12406,7 @@
           <p:cNvPr id="13" name="">
             <a:extLst xmlns:a="http://schemas.openxmlformats.org/drawingml/2006/main">
               <a:ext uri="{FF2B5EF4-FFF2-40B4-BE49-F238E27FC236}">
-                <a16:creationId xmlns:a16="http://schemas.microsoft.com/office/drawing/2014/main" id="{21A79CEE-01CA-41CC-A332-32CE5D9549A4}"/>
+                <a16:creationId xmlns:a16="http://schemas.microsoft.com/office/drawing/2014/main" id="{5FC66CE8-96A6-4280-849B-8B13DD116A06}"/>
               </a:ext>
             </a:extLst>
           </p:cNvPr>
@@ -12455,7 +12463,7 @@
           <p:cNvPr id="14" name="">
             <a:extLst xmlns:a="http://schemas.openxmlformats.org/drawingml/2006/main">
               <a:ext uri="{FF2B5EF4-FFF2-40B4-BE49-F238E27FC236}">
-                <a16:creationId xmlns:a16="http://schemas.microsoft.com/office/drawing/2014/main" id="{4FF1BA35-BD86-449D-8AF7-4F277297690C}"/>
+                <a16:creationId xmlns:a16="http://schemas.microsoft.com/office/drawing/2014/main" id="{C0ACC918-9D6F-4E15-B65E-7A3B0ED9ED2D}"/>
               </a:ext>
             </a:extLst>
           </p:cNvPr>
@@ -12489,7 +12497,7 @@
           <p:cNvPr id="15" name="">
             <a:extLst xmlns:a="http://schemas.openxmlformats.org/drawingml/2006/main">
               <a:ext uri="{FF2B5EF4-FFF2-40B4-BE49-F238E27FC236}">
-                <a16:creationId xmlns:a16="http://schemas.microsoft.com/office/drawing/2014/main" id="{F89BBD08-5C64-4127-9FBD-1C16EAD5322E}"/>
+                <a16:creationId xmlns:a16="http://schemas.microsoft.com/office/drawing/2014/main" id="{B55B40EE-7A40-4A3A-BD54-684873C54960}"/>
               </a:ext>
             </a:extLst>
           </p:cNvPr>
@@ -12521,7 +12529,7 @@
           <p:cNvPr id="16" name="">
             <a:extLst xmlns:a="http://schemas.openxmlformats.org/drawingml/2006/main">
               <a:ext uri="{FF2B5EF4-FFF2-40B4-BE49-F238E27FC236}">
-                <a16:creationId xmlns:a16="http://schemas.microsoft.com/office/drawing/2014/main" id="{E90E6C3C-3406-4D80-A5D3-36D7E9E720F3}"/>
+                <a16:creationId xmlns:a16="http://schemas.microsoft.com/office/drawing/2014/main" id="{2F53E1F3-5AE3-4EC9-8387-C2E396151BB3}"/>
               </a:ext>
             </a:extLst>
           </p:cNvPr>
@@ -12578,7 +12586,7 @@
           <p:cNvPr id="17" name="">
             <a:extLst xmlns:a="http://schemas.openxmlformats.org/drawingml/2006/main">
               <a:ext uri="{FF2B5EF4-FFF2-40B4-BE49-F238E27FC236}">
-                <a16:creationId xmlns:a16="http://schemas.microsoft.com/office/drawing/2014/main" id="{348ED3BC-6F99-4B27-8A1A-827B4CB4AC27}"/>
+                <a16:creationId xmlns:a16="http://schemas.microsoft.com/office/drawing/2014/main" id="{F73F6FE4-3707-4201-8482-93D62C483418}"/>
               </a:ext>
             </a:extLst>
           </p:cNvPr>
@@ -12635,7 +12643,7 @@
           <p:cNvPr id="18" name="">
             <a:extLst xmlns:a="http://schemas.openxmlformats.org/drawingml/2006/main">
               <a:ext uri="{FF2B5EF4-FFF2-40B4-BE49-F238E27FC236}">
-                <a16:creationId xmlns:a16="http://schemas.microsoft.com/office/drawing/2014/main" id="{60CE0A9A-EB43-480D-A1C6-1E206A15F74F}"/>
+                <a16:creationId xmlns:a16="http://schemas.microsoft.com/office/drawing/2014/main" id="{E17896FC-A137-4DE4-998E-2F11AB70B2BC}"/>
               </a:ext>
             </a:extLst>
           </p:cNvPr>
@@ -12669,7 +12677,7 @@
           <p:cNvPr id="19" name="">
             <a:extLst xmlns:a="http://schemas.openxmlformats.org/drawingml/2006/main">
               <a:ext uri="{FF2B5EF4-FFF2-40B4-BE49-F238E27FC236}">
-                <a16:creationId xmlns:a16="http://schemas.microsoft.com/office/drawing/2014/main" id="{539FC29E-312E-4069-8AE5-058A1AFDF409}"/>
+                <a16:creationId xmlns:a16="http://schemas.microsoft.com/office/drawing/2014/main" id="{2D969D67-43D9-4DA7-8CD7-887948FFEA10}"/>
               </a:ext>
             </a:extLst>
           </p:cNvPr>
@@ -12701,7 +12709,7 @@
           <p:cNvPr id="20" name="">
             <a:extLst xmlns:a="http://schemas.openxmlformats.org/drawingml/2006/main">
               <a:ext uri="{FF2B5EF4-FFF2-40B4-BE49-F238E27FC236}">
-                <a16:creationId xmlns:a16="http://schemas.microsoft.com/office/drawing/2014/main" id="{7BA1C96A-7D9D-460C-AEC6-5ABCBDCCA68D}"/>
+                <a16:creationId xmlns:a16="http://schemas.microsoft.com/office/drawing/2014/main" id="{C8214867-7F0A-45A3-8635-0BCC8784227B}"/>
               </a:ext>
             </a:extLst>
           </p:cNvPr>
@@ -12758,7 +12766,7 @@
           <p:cNvPr id="21" name="">
             <a:extLst xmlns:a="http://schemas.openxmlformats.org/drawingml/2006/main">
               <a:ext uri="{FF2B5EF4-FFF2-40B4-BE49-F238E27FC236}">
-                <a16:creationId xmlns:a16="http://schemas.microsoft.com/office/drawing/2014/main" id="{B7057F18-0B8C-4F98-B8A9-0D6DB0C96463}"/>
+                <a16:creationId xmlns:a16="http://schemas.microsoft.com/office/drawing/2014/main" id="{88B2C8F7-735E-4A8D-9672-AB1AC90E142B}"/>
               </a:ext>
             </a:extLst>
           </p:cNvPr>
@@ -12815,7 +12823,7 @@
           <p:cNvPr id="22" name="">
             <a:extLst xmlns:a="http://schemas.openxmlformats.org/drawingml/2006/main">
               <a:ext uri="{FF2B5EF4-FFF2-40B4-BE49-F238E27FC236}">
-                <a16:creationId xmlns:a16="http://schemas.microsoft.com/office/drawing/2014/main" id="{52835C81-8E9D-4029-8D7E-D350CF851B94}"/>
+                <a16:creationId xmlns:a16="http://schemas.microsoft.com/office/drawing/2014/main" id="{22E38229-2D7C-4AD8-934E-51C41B266912}"/>
               </a:ext>
             </a:extLst>
           </p:cNvPr>
@@ -12870,7 +12878,7 @@
     </p:spTree>
     <p:extLst>
       <p:ext uri="{BB962C8B-B14F-4D97-AF65-F5344CB8AC3E}">
-        <p14:creationId xmlns:p14="http://schemas.microsoft.com/office/powerpoint/2010/main" val="993483961"/>
+        <p14:creationId xmlns:p14="http://schemas.microsoft.com/office/powerpoint/2010/main" val="1394822739"/>
       </p:ext>
     </p:extLst>
   </p:cSld>
@@ -13071,7 +13079,7 @@
           <p:cNvPr id="22" name="">
             <a:extLst xmlns:a="http://schemas.openxmlformats.org/drawingml/2006/main">
               <a:ext uri="{FF2B5EF4-FFF2-40B4-BE49-F238E27FC236}">
-                <a16:creationId xmlns:a16="http://schemas.microsoft.com/office/drawing/2014/main" id="{0C2CB41B-E7FB-4739-A0D3-3F66E63F7987}"/>
+                <a16:creationId xmlns:a16="http://schemas.microsoft.com/office/drawing/2014/main" id="{7E49F03F-5216-4689-BD26-5754CB744AA8}"/>
               </a:ext>
             </a:extLst>
           </p:cNvPr>
@@ -13103,7 +13111,7 @@
           <p:cNvPr id="2" name="">
             <a:extLst xmlns:a="http://schemas.openxmlformats.org/drawingml/2006/main">
               <a:ext uri="{FF2B5EF4-FFF2-40B4-BE49-F238E27FC236}">
-                <a16:creationId xmlns:a16="http://schemas.microsoft.com/office/drawing/2014/main" id="{15A4EA55-FAC9-4A1F-A241-4790B8FEF4C4}"/>
+                <a16:creationId xmlns:a16="http://schemas.microsoft.com/office/drawing/2014/main" id="{462CF5E4-33F6-4A7A-B246-28B5F2155DEE}"/>
               </a:ext>
             </a:extLst>
           </p:cNvPr>
@@ -13160,7 +13168,7 @@
           <p:cNvPr id="3" name="">
             <a:extLst xmlns:a="http://schemas.openxmlformats.org/drawingml/2006/main">
               <a:ext uri="{FF2B5EF4-FFF2-40B4-BE49-F238E27FC236}">
-                <a16:creationId xmlns:a16="http://schemas.microsoft.com/office/drawing/2014/main" id="{7019C80F-1363-4EFF-8975-56C05B2D6109}"/>
+                <a16:creationId xmlns:a16="http://schemas.microsoft.com/office/drawing/2014/main" id="{7751C101-D10B-4012-AF8B-068DEEE23F12}"/>
               </a:ext>
             </a:extLst>
           </p:cNvPr>
@@ -13192,7 +13200,7 @@
           <p:cNvPr id="4" name="">
             <a:extLst xmlns:a="http://schemas.openxmlformats.org/drawingml/2006/main">
               <a:ext uri="{FF2B5EF4-FFF2-40B4-BE49-F238E27FC236}">
-                <a16:creationId xmlns:a16="http://schemas.microsoft.com/office/drawing/2014/main" id="{067C9C80-9CC4-4E65-AA0F-B5C7FE2F3E6A}"/>
+                <a16:creationId xmlns:a16="http://schemas.microsoft.com/office/drawing/2014/main" id="{68E03CD6-687A-4AA6-9AB5-F755CAF9705E}"/>
               </a:ext>
             </a:extLst>
           </p:cNvPr>
@@ -13249,7 +13257,7 @@
           <p:cNvPr id="5" name="">
             <a:extLst xmlns:a="http://schemas.openxmlformats.org/drawingml/2006/main">
               <a:ext uri="{FF2B5EF4-FFF2-40B4-BE49-F238E27FC236}">
-                <a16:creationId xmlns:a16="http://schemas.microsoft.com/office/drawing/2014/main" id="{6ECE1AB1-1505-43FF-A04F-78EFF7ED2FEA}"/>
+                <a16:creationId xmlns:a16="http://schemas.microsoft.com/office/drawing/2014/main" id="{8D827A0D-558C-4E7F-ACB3-DABA3A297480}"/>
               </a:ext>
             </a:extLst>
           </p:cNvPr>
@@ -13306,7 +13314,7 @@
           <p:cNvPr id="6" name="">
             <a:extLst xmlns:a="http://schemas.openxmlformats.org/drawingml/2006/main">
               <a:ext uri="{FF2B5EF4-FFF2-40B4-BE49-F238E27FC236}">
-                <a16:creationId xmlns:a16="http://schemas.microsoft.com/office/drawing/2014/main" id="{BBEB0DED-CD37-47DA-A55E-1E0D98461A1C}"/>
+                <a16:creationId xmlns:a16="http://schemas.microsoft.com/office/drawing/2014/main" id="{023491C9-8749-4EE5-84DB-92BAB2CA223B}"/>
               </a:ext>
             </a:extLst>
           </p:cNvPr>
@@ -13363,7 +13371,7 @@
           <p:cNvPr id="7" name="">
             <a:extLst xmlns:a="http://schemas.openxmlformats.org/drawingml/2006/main">
               <a:ext uri="{FF2B5EF4-FFF2-40B4-BE49-F238E27FC236}">
-                <a16:creationId xmlns:a16="http://schemas.microsoft.com/office/drawing/2014/main" id="{AA53106E-2C64-49F9-A2F0-1D6262D94A6E}"/>
+                <a16:creationId xmlns:a16="http://schemas.microsoft.com/office/drawing/2014/main" id="{C9364A4C-E77D-4EA4-ABBA-FC91D044791F}"/>
               </a:ext>
             </a:extLst>
           </p:cNvPr>
@@ -13395,7 +13403,7 @@
           <p:cNvPr id="8" name="">
             <a:extLst xmlns:a="http://schemas.openxmlformats.org/drawingml/2006/main">
               <a:ext uri="{FF2B5EF4-FFF2-40B4-BE49-F238E27FC236}">
-                <a16:creationId xmlns:a16="http://schemas.microsoft.com/office/drawing/2014/main" id="{D8E2C8C5-0CD3-4E66-8936-00F6DF6C39BA}"/>
+                <a16:creationId xmlns:a16="http://schemas.microsoft.com/office/drawing/2014/main" id="{6CDEB765-BEAE-446A-99A5-ADFEFFB541A6}"/>
               </a:ext>
             </a:extLst>
           </p:cNvPr>
@@ -13452,7 +13460,7 @@
           <p:cNvPr id="9" name="">
             <a:extLst xmlns:a="http://schemas.openxmlformats.org/drawingml/2006/main">
               <a:ext uri="{FF2B5EF4-FFF2-40B4-BE49-F238E27FC236}">
-                <a16:creationId xmlns:a16="http://schemas.microsoft.com/office/drawing/2014/main" id="{9525A759-D3E7-450D-8326-43B6326DAF6D}"/>
+                <a16:creationId xmlns:a16="http://schemas.microsoft.com/office/drawing/2014/main" id="{CA9CD099-8B9B-4FA8-BFB8-B87C92991A81}"/>
               </a:ext>
             </a:extLst>
           </p:cNvPr>
@@ -13509,7 +13517,7 @@
           <p:cNvPr id="10" name="">
             <a:extLst xmlns:a="http://schemas.openxmlformats.org/drawingml/2006/main">
               <a:ext uri="{FF2B5EF4-FFF2-40B4-BE49-F238E27FC236}">
-                <a16:creationId xmlns:a16="http://schemas.microsoft.com/office/drawing/2014/main" id="{C44C0127-435F-4BB8-AC26-698008BDD506}"/>
+                <a16:creationId xmlns:a16="http://schemas.microsoft.com/office/drawing/2014/main" id="{ED9327B0-7F0A-4456-A27C-2C65DEFBD38F}"/>
               </a:ext>
             </a:extLst>
           </p:cNvPr>
@@ -13543,7 +13551,7 @@
           <p:cNvPr id="11" name="">
             <a:extLst xmlns:a="http://schemas.openxmlformats.org/drawingml/2006/main">
               <a:ext uri="{FF2B5EF4-FFF2-40B4-BE49-F238E27FC236}">
-                <a16:creationId xmlns:a16="http://schemas.microsoft.com/office/drawing/2014/main" id="{24B60B22-BC30-426E-B6E1-6FE558C6A245}"/>
+                <a16:creationId xmlns:a16="http://schemas.microsoft.com/office/drawing/2014/main" id="{75CBB2F2-3371-4F2D-917C-DFEB39C0F9C4}"/>
               </a:ext>
             </a:extLst>
           </p:cNvPr>
@@ -13575,7 +13583,7 @@
           <p:cNvPr id="12" name="">
             <a:extLst xmlns:a="http://schemas.openxmlformats.org/drawingml/2006/main">
               <a:ext uri="{FF2B5EF4-FFF2-40B4-BE49-F238E27FC236}">
-                <a16:creationId xmlns:a16="http://schemas.microsoft.com/office/drawing/2014/main" id="{01F55618-8FC5-4891-AF35-CF44F220B461}"/>
+                <a16:creationId xmlns:a16="http://schemas.microsoft.com/office/drawing/2014/main" id="{B7011CAB-05E3-4AAB-B20E-FFF454265FB5}"/>
               </a:ext>
             </a:extLst>
           </p:cNvPr>
@@ -13632,7 +13640,7 @@
           <p:cNvPr id="13" name="">
             <a:extLst xmlns:a="http://schemas.openxmlformats.org/drawingml/2006/main">
               <a:ext uri="{FF2B5EF4-FFF2-40B4-BE49-F238E27FC236}">
-                <a16:creationId xmlns:a16="http://schemas.microsoft.com/office/drawing/2014/main" id="{53516263-29DF-4EBE-8609-2CE14ED05C76}"/>
+                <a16:creationId xmlns:a16="http://schemas.microsoft.com/office/drawing/2014/main" id="{ADEDA85C-AF33-4F67-B9EA-BE1CA70C8A80}"/>
               </a:ext>
             </a:extLst>
           </p:cNvPr>
@@ -13689,7 +13697,7 @@
           <p:cNvPr id="14" name="">
             <a:extLst xmlns:a="http://schemas.openxmlformats.org/drawingml/2006/main">
               <a:ext uri="{FF2B5EF4-FFF2-40B4-BE49-F238E27FC236}">
-                <a16:creationId xmlns:a16="http://schemas.microsoft.com/office/drawing/2014/main" id="{57DF6998-F4CC-4DA7-B65A-68EB7347AC03}"/>
+                <a16:creationId xmlns:a16="http://schemas.microsoft.com/office/drawing/2014/main" id="{16267193-9280-4001-8D63-1050F7788736}"/>
               </a:ext>
             </a:extLst>
           </p:cNvPr>
@@ -13723,7 +13731,7 @@
           <p:cNvPr id="15" name="">
             <a:extLst xmlns:a="http://schemas.openxmlformats.org/drawingml/2006/main">
               <a:ext uri="{FF2B5EF4-FFF2-40B4-BE49-F238E27FC236}">
-                <a16:creationId xmlns:a16="http://schemas.microsoft.com/office/drawing/2014/main" id="{D037AB49-8D32-4B4B-8C95-781CE928A1DD}"/>
+                <a16:creationId xmlns:a16="http://schemas.microsoft.com/office/drawing/2014/main" id="{6E6DE4CB-3F73-4C86-9F45-21209BCA2571}"/>
               </a:ext>
             </a:extLst>
           </p:cNvPr>
@@ -13755,7 +13763,7 @@
           <p:cNvPr id="16" name="">
             <a:extLst xmlns:a="http://schemas.openxmlformats.org/drawingml/2006/main">
               <a:ext uri="{FF2B5EF4-FFF2-40B4-BE49-F238E27FC236}">
-                <a16:creationId xmlns:a16="http://schemas.microsoft.com/office/drawing/2014/main" id="{70C3F5E4-AA41-4B72-857D-D7E73C7F445B}"/>
+                <a16:creationId xmlns:a16="http://schemas.microsoft.com/office/drawing/2014/main" id="{A50DB994-4507-4042-8B3A-9E6A8F19AD82}"/>
               </a:ext>
             </a:extLst>
           </p:cNvPr>
@@ -13812,7 +13820,7 @@
           <p:cNvPr id="17" name="">
             <a:extLst xmlns:a="http://schemas.openxmlformats.org/drawingml/2006/main">
               <a:ext uri="{FF2B5EF4-FFF2-40B4-BE49-F238E27FC236}">
-                <a16:creationId xmlns:a16="http://schemas.microsoft.com/office/drawing/2014/main" id="{F83F5676-EB5A-49F0-AE87-96E3391849F0}"/>
+                <a16:creationId xmlns:a16="http://schemas.microsoft.com/office/drawing/2014/main" id="{E7BF4C1F-1E70-40BD-BE5E-78F26DB92CEE}"/>
               </a:ext>
             </a:extLst>
           </p:cNvPr>
@@ -13869,7 +13877,7 @@
           <p:cNvPr id="18" name="">
             <a:extLst xmlns:a="http://schemas.openxmlformats.org/drawingml/2006/main">
               <a:ext uri="{FF2B5EF4-FFF2-40B4-BE49-F238E27FC236}">
-                <a16:creationId xmlns:a16="http://schemas.microsoft.com/office/drawing/2014/main" id="{0C1387C4-6EC5-4655-9218-D7B9B04A6C4A}"/>
+                <a16:creationId xmlns:a16="http://schemas.microsoft.com/office/drawing/2014/main" id="{E3C468F8-E9FB-4284-A1C6-40235A6B99B3}"/>
               </a:ext>
             </a:extLst>
           </p:cNvPr>
@@ -13903,7 +13911,7 @@
           <p:cNvPr id="19" name="">
             <a:extLst xmlns:a="http://schemas.openxmlformats.org/drawingml/2006/main">
               <a:ext uri="{FF2B5EF4-FFF2-40B4-BE49-F238E27FC236}">
-                <a16:creationId xmlns:a16="http://schemas.microsoft.com/office/drawing/2014/main" id="{2CA929A7-CF88-4015-AFC4-1AE6E68F629C}"/>
+                <a16:creationId xmlns:a16="http://schemas.microsoft.com/office/drawing/2014/main" id="{7C3DEDC0-7D0A-422C-8308-F1122DBFBC57}"/>
               </a:ext>
             </a:extLst>
           </p:cNvPr>
@@ -13935,7 +13943,7 @@
           <p:cNvPr id="20" name="">
             <a:extLst xmlns:a="http://schemas.openxmlformats.org/drawingml/2006/main">
               <a:ext uri="{FF2B5EF4-FFF2-40B4-BE49-F238E27FC236}">
-                <a16:creationId xmlns:a16="http://schemas.microsoft.com/office/drawing/2014/main" id="{6B2FEBFB-62A0-48C7-8029-80FA35CE992C}"/>
+                <a16:creationId xmlns:a16="http://schemas.microsoft.com/office/drawing/2014/main" id="{C55F0118-4525-433F-BA2C-DC507E345968}"/>
               </a:ext>
             </a:extLst>
           </p:cNvPr>
@@ -13992,7 +14000,7 @@
           <p:cNvPr id="21" name="">
             <a:extLst xmlns:a="http://schemas.openxmlformats.org/drawingml/2006/main">
               <a:ext uri="{FF2B5EF4-FFF2-40B4-BE49-F238E27FC236}">
-                <a16:creationId xmlns:a16="http://schemas.microsoft.com/office/drawing/2014/main" id="{4EE02B65-2B0E-44F8-BAEF-661140E4A056}"/>
+                <a16:creationId xmlns:a16="http://schemas.microsoft.com/office/drawing/2014/main" id="{F54C398F-4BA8-4C49-B4BF-9217CA89B0EF}"/>
               </a:ext>
             </a:extLst>
           </p:cNvPr>
@@ -14047,7 +14055,7 @@
     </p:spTree>
     <p:extLst>
       <p:ext uri="{BB962C8B-B14F-4D97-AF65-F5344CB8AC3E}">
-        <p14:creationId xmlns:p14="http://schemas.microsoft.com/office/powerpoint/2010/main" val="1599269616"/>
+        <p14:creationId xmlns:p14="http://schemas.microsoft.com/office/powerpoint/2010/main" val="653128939"/>
       </p:ext>
     </p:extLst>
   </p:cSld>
